--- a/~sasano/lecture/proglang/26/proglang3Ans.pptx
+++ b/~sasano/lecture/proglang/26/proglang3Ans.pptx
@@ -116,6 +116,22 @@
       </a:defRPr>
     </a:lvl9pPr>
   </p:defaultTextStyle>
+  <p:extLst>
+    <p:ext uri="{EFAFB233-063F-42B5-8137-9DF3F51BA10A}">
+      <p15:sldGuideLst xmlns:p15="http://schemas.microsoft.com/office/powerpoint/2012/main">
+        <p15:guide id="1" orient="horz" pos="2160">
+          <p15:clr>
+            <a:srgbClr val="A4A3A4"/>
+          </p15:clr>
+        </p15:guide>
+        <p15:guide id="2" pos="2880">
+          <p15:clr>
+            <a:srgbClr val="A4A3A4"/>
+          </p15:clr>
+        </p15:guide>
+      </p15:sldGuideLst>
+    </p:ext>
+  </p:extLst>
 </p:presentation>
 </file>
 
@@ -202,7 +218,7 @@
             <a:fld id="{F61AC52B-4C5B-4329-B70A-EF9B7E71F231}" type="datetimeFigureOut">
               <a:rPr kumimoji="1" lang="ja-JP" altLang="en-US" smtClean="0"/>
               <a:pPr/>
-              <a:t>16/10/25</a:t>
+              <a:t>2026/9/28</a:t>
             </a:fld>
             <a:endParaRPr kumimoji="1" lang="ja-JP" altLang="en-US"/>
           </a:p>
@@ -268,70 +284,69 @@
           <a:p>
             <a:pPr lvl="0"/>
             <a:r>
-              <a:rPr kumimoji="1" lang="ja-JP" altLang="en-US" smtClean="0"/>
+              <a:rPr kumimoji="1" lang="ja-JP" altLang="en-US"/>
               <a:t>マスタ テキストの書式設定</a:t>
             </a:r>
           </a:p>
           <a:p>
             <a:pPr lvl="1"/>
             <a:r>
-              <a:rPr kumimoji="1" lang="ja-JP" altLang="en-US" smtClean="0"/>
+              <a:rPr kumimoji="1" lang="ja-JP" altLang="en-US"/>
               <a:t>第 </a:t>
             </a:r>
             <a:r>
-              <a:rPr kumimoji="1" lang="en-US" altLang="ja-JP" smtClean="0"/>
+              <a:rPr kumimoji="1" lang="en-US" altLang="ja-JP"/>
               <a:t>2 </a:t>
             </a:r>
             <a:r>
-              <a:rPr kumimoji="1" lang="ja-JP" altLang="en-US" smtClean="0"/>
+              <a:rPr kumimoji="1" lang="ja-JP" altLang="en-US"/>
               <a:t>レベル</a:t>
             </a:r>
           </a:p>
           <a:p>
             <a:pPr lvl="2"/>
             <a:r>
-              <a:rPr kumimoji="1" lang="ja-JP" altLang="en-US" smtClean="0"/>
+              <a:rPr kumimoji="1" lang="ja-JP" altLang="en-US"/>
               <a:t>第 </a:t>
             </a:r>
             <a:r>
-              <a:rPr kumimoji="1" lang="en-US" altLang="ja-JP" smtClean="0"/>
+              <a:rPr kumimoji="1" lang="en-US" altLang="ja-JP"/>
               <a:t>3 </a:t>
             </a:r>
             <a:r>
-              <a:rPr kumimoji="1" lang="ja-JP" altLang="en-US" smtClean="0"/>
+              <a:rPr kumimoji="1" lang="ja-JP" altLang="en-US"/>
               <a:t>レベル</a:t>
             </a:r>
           </a:p>
           <a:p>
             <a:pPr lvl="3"/>
             <a:r>
-              <a:rPr kumimoji="1" lang="ja-JP" altLang="en-US" smtClean="0"/>
+              <a:rPr kumimoji="1" lang="ja-JP" altLang="en-US"/>
               <a:t>第 </a:t>
             </a:r>
             <a:r>
-              <a:rPr kumimoji="1" lang="en-US" altLang="ja-JP" smtClean="0"/>
+              <a:rPr kumimoji="1" lang="en-US" altLang="ja-JP"/>
               <a:t>4 </a:t>
             </a:r>
             <a:r>
-              <a:rPr kumimoji="1" lang="ja-JP" altLang="en-US" smtClean="0"/>
+              <a:rPr kumimoji="1" lang="ja-JP" altLang="en-US"/>
               <a:t>レベル</a:t>
             </a:r>
           </a:p>
           <a:p>
             <a:pPr lvl="4"/>
             <a:r>
-              <a:rPr kumimoji="1" lang="ja-JP" altLang="en-US" smtClean="0"/>
+              <a:rPr kumimoji="1" lang="ja-JP" altLang="en-US"/>
               <a:t>第 </a:t>
             </a:r>
             <a:r>
-              <a:rPr kumimoji="1" lang="en-US" altLang="ja-JP" smtClean="0"/>
+              <a:rPr kumimoji="1" lang="en-US" altLang="ja-JP"/>
               <a:t>5 </a:t>
             </a:r>
             <a:r>
-              <a:rPr kumimoji="1" lang="ja-JP" altLang="en-US" smtClean="0"/>
+              <a:rPr kumimoji="1" lang="ja-JP" altLang="en-US"/>
               <a:t>レベル</a:t>
             </a:r>
-            <a:endParaRPr kumimoji="1" lang="ja-JP" altLang="en-US"/>
           </a:p>
         </p:txBody>
       </p:sp>
@@ -543,10 +558,9 @@
           <a:lstStyle/>
           <a:p>
             <a:r>
-              <a:rPr kumimoji="1" lang="ja-JP" altLang="en-US" smtClean="0"/>
+              <a:rPr kumimoji="1" lang="ja-JP" altLang="en-US"/>
               <a:t>マスタ タイトルの書式設定</a:t>
             </a:r>
-            <a:endParaRPr kumimoji="1" lang="ja-JP" altLang="en-US"/>
           </a:p>
         </p:txBody>
       </p:sp>
@@ -662,10 +676,9 @@
           </a:lstStyle>
           <a:p>
             <a:r>
-              <a:rPr kumimoji="1" lang="ja-JP" altLang="en-US" smtClean="0"/>
+              <a:rPr kumimoji="1" lang="ja-JP" altLang="en-US"/>
               <a:t>マスタ サブタイトルの書式設定</a:t>
             </a:r>
-            <a:endParaRPr kumimoji="1" lang="ja-JP" altLang="en-US"/>
           </a:p>
         </p:txBody>
       </p:sp>
@@ -687,7 +700,7 @@
             <a:fld id="{E90ED720-0104-4369-84BC-D37694168613}" type="datetimeFigureOut">
               <a:rPr kumimoji="1" lang="ja-JP" altLang="en-US" smtClean="0"/>
               <a:pPr/>
-              <a:t>16/10/25</a:t>
+              <a:t>2026/9/28</a:t>
             </a:fld>
             <a:endParaRPr kumimoji="1" lang="ja-JP" altLang="en-US"/>
           </a:p>
@@ -777,10 +790,9 @@
           <a:lstStyle/>
           <a:p>
             <a:r>
-              <a:rPr kumimoji="1" lang="ja-JP" altLang="en-US" smtClean="0"/>
+              <a:rPr kumimoji="1" lang="ja-JP" altLang="en-US"/>
               <a:t>マスタ タイトルの書式設定</a:t>
             </a:r>
-            <a:endParaRPr kumimoji="1" lang="ja-JP" altLang="en-US"/>
           </a:p>
         </p:txBody>
       </p:sp>
@@ -801,70 +813,69 @@
           <a:p>
             <a:pPr lvl="0"/>
             <a:r>
-              <a:rPr kumimoji="1" lang="ja-JP" altLang="en-US" smtClean="0"/>
+              <a:rPr kumimoji="1" lang="ja-JP" altLang="en-US"/>
               <a:t>マスタ テキストの書式設定</a:t>
             </a:r>
           </a:p>
           <a:p>
             <a:pPr lvl="1"/>
             <a:r>
-              <a:rPr kumimoji="1" lang="ja-JP" altLang="en-US" smtClean="0"/>
+              <a:rPr kumimoji="1" lang="ja-JP" altLang="en-US"/>
               <a:t>第 </a:t>
             </a:r>
             <a:r>
-              <a:rPr kumimoji="1" lang="en-US" altLang="ja-JP" smtClean="0"/>
+              <a:rPr kumimoji="1" lang="en-US" altLang="ja-JP"/>
               <a:t>2 </a:t>
             </a:r>
             <a:r>
-              <a:rPr kumimoji="1" lang="ja-JP" altLang="en-US" smtClean="0"/>
+              <a:rPr kumimoji="1" lang="ja-JP" altLang="en-US"/>
               <a:t>レベル</a:t>
             </a:r>
           </a:p>
           <a:p>
             <a:pPr lvl="2"/>
             <a:r>
-              <a:rPr kumimoji="1" lang="ja-JP" altLang="en-US" smtClean="0"/>
+              <a:rPr kumimoji="1" lang="ja-JP" altLang="en-US"/>
               <a:t>第 </a:t>
             </a:r>
             <a:r>
-              <a:rPr kumimoji="1" lang="en-US" altLang="ja-JP" smtClean="0"/>
+              <a:rPr kumimoji="1" lang="en-US" altLang="ja-JP"/>
               <a:t>3 </a:t>
             </a:r>
             <a:r>
-              <a:rPr kumimoji="1" lang="ja-JP" altLang="en-US" smtClean="0"/>
+              <a:rPr kumimoji="1" lang="ja-JP" altLang="en-US"/>
               <a:t>レベル</a:t>
             </a:r>
           </a:p>
           <a:p>
             <a:pPr lvl="3"/>
             <a:r>
-              <a:rPr kumimoji="1" lang="ja-JP" altLang="en-US" smtClean="0"/>
+              <a:rPr kumimoji="1" lang="ja-JP" altLang="en-US"/>
               <a:t>第 </a:t>
             </a:r>
             <a:r>
-              <a:rPr kumimoji="1" lang="en-US" altLang="ja-JP" smtClean="0"/>
+              <a:rPr kumimoji="1" lang="en-US" altLang="ja-JP"/>
               <a:t>4 </a:t>
             </a:r>
             <a:r>
-              <a:rPr kumimoji="1" lang="ja-JP" altLang="en-US" smtClean="0"/>
+              <a:rPr kumimoji="1" lang="ja-JP" altLang="en-US"/>
               <a:t>レベル</a:t>
             </a:r>
           </a:p>
           <a:p>
             <a:pPr lvl="4"/>
             <a:r>
-              <a:rPr kumimoji="1" lang="ja-JP" altLang="en-US" smtClean="0"/>
+              <a:rPr kumimoji="1" lang="ja-JP" altLang="en-US"/>
               <a:t>第 </a:t>
             </a:r>
             <a:r>
-              <a:rPr kumimoji="1" lang="en-US" altLang="ja-JP" smtClean="0"/>
+              <a:rPr kumimoji="1" lang="en-US" altLang="ja-JP"/>
               <a:t>5 </a:t>
             </a:r>
             <a:r>
-              <a:rPr kumimoji="1" lang="ja-JP" altLang="en-US" smtClean="0"/>
+              <a:rPr kumimoji="1" lang="ja-JP" altLang="en-US"/>
               <a:t>レベル</a:t>
             </a:r>
-            <a:endParaRPr kumimoji="1" lang="ja-JP" altLang="en-US"/>
           </a:p>
         </p:txBody>
       </p:sp>
@@ -886,7 +897,7 @@
             <a:fld id="{E90ED720-0104-4369-84BC-D37694168613}" type="datetimeFigureOut">
               <a:rPr kumimoji="1" lang="ja-JP" altLang="en-US" smtClean="0"/>
               <a:pPr/>
-              <a:t>16/10/25</a:t>
+              <a:t>2026/9/28</a:t>
             </a:fld>
             <a:endParaRPr kumimoji="1" lang="ja-JP" altLang="en-US"/>
           </a:p>
@@ -981,10 +992,9 @@
           <a:lstStyle/>
           <a:p>
             <a:r>
-              <a:rPr kumimoji="1" lang="ja-JP" altLang="en-US" smtClean="0"/>
+              <a:rPr kumimoji="1" lang="ja-JP" altLang="en-US"/>
               <a:t>マスタ タイトルの書式設定</a:t>
             </a:r>
-            <a:endParaRPr kumimoji="1" lang="ja-JP" altLang="en-US"/>
           </a:p>
         </p:txBody>
       </p:sp>
@@ -1010,70 +1020,69 @@
           <a:p>
             <a:pPr lvl="0"/>
             <a:r>
-              <a:rPr kumimoji="1" lang="ja-JP" altLang="en-US" smtClean="0"/>
+              <a:rPr kumimoji="1" lang="ja-JP" altLang="en-US"/>
               <a:t>マスタ テキストの書式設定</a:t>
             </a:r>
           </a:p>
           <a:p>
             <a:pPr lvl="1"/>
             <a:r>
-              <a:rPr kumimoji="1" lang="ja-JP" altLang="en-US" smtClean="0"/>
+              <a:rPr kumimoji="1" lang="ja-JP" altLang="en-US"/>
               <a:t>第 </a:t>
             </a:r>
             <a:r>
-              <a:rPr kumimoji="1" lang="en-US" altLang="ja-JP" smtClean="0"/>
+              <a:rPr kumimoji="1" lang="en-US" altLang="ja-JP"/>
               <a:t>2 </a:t>
             </a:r>
             <a:r>
-              <a:rPr kumimoji="1" lang="ja-JP" altLang="en-US" smtClean="0"/>
+              <a:rPr kumimoji="1" lang="ja-JP" altLang="en-US"/>
               <a:t>レベル</a:t>
             </a:r>
           </a:p>
           <a:p>
             <a:pPr lvl="2"/>
             <a:r>
-              <a:rPr kumimoji="1" lang="ja-JP" altLang="en-US" smtClean="0"/>
+              <a:rPr kumimoji="1" lang="ja-JP" altLang="en-US"/>
               <a:t>第 </a:t>
             </a:r>
             <a:r>
-              <a:rPr kumimoji="1" lang="en-US" altLang="ja-JP" smtClean="0"/>
+              <a:rPr kumimoji="1" lang="en-US" altLang="ja-JP"/>
               <a:t>3 </a:t>
             </a:r>
             <a:r>
-              <a:rPr kumimoji="1" lang="ja-JP" altLang="en-US" smtClean="0"/>
+              <a:rPr kumimoji="1" lang="ja-JP" altLang="en-US"/>
               <a:t>レベル</a:t>
             </a:r>
           </a:p>
           <a:p>
             <a:pPr lvl="3"/>
             <a:r>
-              <a:rPr kumimoji="1" lang="ja-JP" altLang="en-US" smtClean="0"/>
+              <a:rPr kumimoji="1" lang="ja-JP" altLang="en-US"/>
               <a:t>第 </a:t>
             </a:r>
             <a:r>
-              <a:rPr kumimoji="1" lang="en-US" altLang="ja-JP" smtClean="0"/>
+              <a:rPr kumimoji="1" lang="en-US" altLang="ja-JP"/>
               <a:t>4 </a:t>
             </a:r>
             <a:r>
-              <a:rPr kumimoji="1" lang="ja-JP" altLang="en-US" smtClean="0"/>
+              <a:rPr kumimoji="1" lang="ja-JP" altLang="en-US"/>
               <a:t>レベル</a:t>
             </a:r>
           </a:p>
           <a:p>
             <a:pPr lvl="4"/>
             <a:r>
-              <a:rPr kumimoji="1" lang="ja-JP" altLang="en-US" smtClean="0"/>
+              <a:rPr kumimoji="1" lang="ja-JP" altLang="en-US"/>
               <a:t>第 </a:t>
             </a:r>
             <a:r>
-              <a:rPr kumimoji="1" lang="en-US" altLang="ja-JP" smtClean="0"/>
+              <a:rPr kumimoji="1" lang="en-US" altLang="ja-JP"/>
               <a:t>5 </a:t>
             </a:r>
             <a:r>
-              <a:rPr kumimoji="1" lang="ja-JP" altLang="en-US" smtClean="0"/>
+              <a:rPr kumimoji="1" lang="ja-JP" altLang="en-US"/>
               <a:t>レベル</a:t>
             </a:r>
-            <a:endParaRPr kumimoji="1" lang="ja-JP" altLang="en-US"/>
           </a:p>
         </p:txBody>
       </p:sp>
@@ -1095,7 +1104,7 @@
             <a:fld id="{E90ED720-0104-4369-84BC-D37694168613}" type="datetimeFigureOut">
               <a:rPr kumimoji="1" lang="ja-JP" altLang="en-US" smtClean="0"/>
               <a:pPr/>
-              <a:t>16/10/25</a:t>
+              <a:t>2026/9/28</a:t>
             </a:fld>
             <a:endParaRPr kumimoji="1" lang="ja-JP" altLang="en-US"/>
           </a:p>
@@ -1185,10 +1194,9 @@
           <a:lstStyle/>
           <a:p>
             <a:r>
-              <a:rPr kumimoji="1" lang="ja-JP" altLang="en-US" smtClean="0"/>
+              <a:rPr kumimoji="1" lang="ja-JP" altLang="en-US"/>
               <a:t>マスタ タイトルの書式設定</a:t>
             </a:r>
-            <a:endParaRPr kumimoji="1" lang="ja-JP" altLang="en-US"/>
           </a:p>
         </p:txBody>
       </p:sp>
@@ -1209,70 +1217,69 @@
           <a:p>
             <a:pPr lvl="0"/>
             <a:r>
-              <a:rPr kumimoji="1" lang="ja-JP" altLang="en-US" smtClean="0"/>
+              <a:rPr kumimoji="1" lang="ja-JP" altLang="en-US"/>
               <a:t>マスタ テキストの書式設定</a:t>
             </a:r>
           </a:p>
           <a:p>
             <a:pPr lvl="1"/>
             <a:r>
-              <a:rPr kumimoji="1" lang="ja-JP" altLang="en-US" smtClean="0"/>
+              <a:rPr kumimoji="1" lang="ja-JP" altLang="en-US"/>
               <a:t>第 </a:t>
             </a:r>
             <a:r>
-              <a:rPr kumimoji="1" lang="en-US" altLang="ja-JP" smtClean="0"/>
+              <a:rPr kumimoji="1" lang="en-US" altLang="ja-JP"/>
               <a:t>2 </a:t>
             </a:r>
             <a:r>
-              <a:rPr kumimoji="1" lang="ja-JP" altLang="en-US" smtClean="0"/>
+              <a:rPr kumimoji="1" lang="ja-JP" altLang="en-US"/>
               <a:t>レベル</a:t>
             </a:r>
           </a:p>
           <a:p>
             <a:pPr lvl="2"/>
             <a:r>
-              <a:rPr kumimoji="1" lang="ja-JP" altLang="en-US" smtClean="0"/>
+              <a:rPr kumimoji="1" lang="ja-JP" altLang="en-US"/>
               <a:t>第 </a:t>
             </a:r>
             <a:r>
-              <a:rPr kumimoji="1" lang="en-US" altLang="ja-JP" smtClean="0"/>
+              <a:rPr kumimoji="1" lang="en-US" altLang="ja-JP"/>
               <a:t>3 </a:t>
             </a:r>
             <a:r>
-              <a:rPr kumimoji="1" lang="ja-JP" altLang="en-US" smtClean="0"/>
+              <a:rPr kumimoji="1" lang="ja-JP" altLang="en-US"/>
               <a:t>レベル</a:t>
             </a:r>
           </a:p>
           <a:p>
             <a:pPr lvl="3"/>
             <a:r>
-              <a:rPr kumimoji="1" lang="ja-JP" altLang="en-US" smtClean="0"/>
+              <a:rPr kumimoji="1" lang="ja-JP" altLang="en-US"/>
               <a:t>第 </a:t>
             </a:r>
             <a:r>
-              <a:rPr kumimoji="1" lang="en-US" altLang="ja-JP" smtClean="0"/>
+              <a:rPr kumimoji="1" lang="en-US" altLang="ja-JP"/>
               <a:t>4 </a:t>
             </a:r>
             <a:r>
-              <a:rPr kumimoji="1" lang="ja-JP" altLang="en-US" smtClean="0"/>
+              <a:rPr kumimoji="1" lang="ja-JP" altLang="en-US"/>
               <a:t>レベル</a:t>
             </a:r>
           </a:p>
           <a:p>
             <a:pPr lvl="4"/>
             <a:r>
-              <a:rPr kumimoji="1" lang="ja-JP" altLang="en-US" smtClean="0"/>
+              <a:rPr kumimoji="1" lang="ja-JP" altLang="en-US"/>
               <a:t>第 </a:t>
             </a:r>
             <a:r>
-              <a:rPr kumimoji="1" lang="en-US" altLang="ja-JP" smtClean="0"/>
+              <a:rPr kumimoji="1" lang="en-US" altLang="ja-JP"/>
               <a:t>5 </a:t>
             </a:r>
             <a:r>
-              <a:rPr kumimoji="1" lang="ja-JP" altLang="en-US" smtClean="0"/>
+              <a:rPr kumimoji="1" lang="ja-JP" altLang="en-US"/>
               <a:t>レベル</a:t>
             </a:r>
-            <a:endParaRPr kumimoji="1" lang="ja-JP" altLang="en-US"/>
           </a:p>
         </p:txBody>
       </p:sp>
@@ -1294,7 +1301,7 @@
             <a:fld id="{E90ED720-0104-4369-84BC-D37694168613}" type="datetimeFigureOut">
               <a:rPr kumimoji="1" lang="ja-JP" altLang="en-US" smtClean="0"/>
               <a:pPr/>
-              <a:t>16/10/25</a:t>
+              <a:t>2026/9/28</a:t>
             </a:fld>
             <a:endParaRPr kumimoji="1" lang="ja-JP" altLang="en-US"/>
           </a:p>
@@ -1393,10 +1400,9 @@
           </a:lstStyle>
           <a:p>
             <a:r>
-              <a:rPr kumimoji="1" lang="ja-JP" altLang="en-US" smtClean="0"/>
+              <a:rPr kumimoji="1" lang="ja-JP" altLang="en-US"/>
               <a:t>マスタ タイトルの書式設定</a:t>
             </a:r>
-            <a:endParaRPr kumimoji="1" lang="ja-JP" altLang="en-US"/>
           </a:p>
         </p:txBody>
       </p:sp>
@@ -1513,7 +1519,7 @@
           <a:p>
             <a:pPr lvl="0"/>
             <a:r>
-              <a:rPr kumimoji="1" lang="ja-JP" altLang="en-US" smtClean="0"/>
+              <a:rPr kumimoji="1" lang="ja-JP" altLang="en-US"/>
               <a:t>マスタ テキストの書式設定</a:t>
             </a:r>
           </a:p>
@@ -1537,7 +1543,7 @@
             <a:fld id="{E90ED720-0104-4369-84BC-D37694168613}" type="datetimeFigureOut">
               <a:rPr kumimoji="1" lang="ja-JP" altLang="en-US" smtClean="0"/>
               <a:pPr/>
-              <a:t>16/10/25</a:t>
+              <a:t>2026/9/28</a:t>
             </a:fld>
             <a:endParaRPr kumimoji="1" lang="ja-JP" altLang="en-US"/>
           </a:p>
@@ -1627,10 +1633,9 @@
           <a:lstStyle/>
           <a:p>
             <a:r>
-              <a:rPr kumimoji="1" lang="ja-JP" altLang="en-US" smtClean="0"/>
+              <a:rPr kumimoji="1" lang="ja-JP" altLang="en-US"/>
               <a:t>マスタ タイトルの書式設定</a:t>
             </a:r>
-            <a:endParaRPr kumimoji="1" lang="ja-JP" altLang="en-US"/>
           </a:p>
         </p:txBody>
       </p:sp>
@@ -1684,70 +1689,69 @@
           <a:p>
             <a:pPr lvl="0"/>
             <a:r>
-              <a:rPr kumimoji="1" lang="ja-JP" altLang="en-US" smtClean="0"/>
+              <a:rPr kumimoji="1" lang="ja-JP" altLang="en-US"/>
               <a:t>マスタ テキストの書式設定</a:t>
             </a:r>
           </a:p>
           <a:p>
             <a:pPr lvl="1"/>
             <a:r>
-              <a:rPr kumimoji="1" lang="ja-JP" altLang="en-US" smtClean="0"/>
+              <a:rPr kumimoji="1" lang="ja-JP" altLang="en-US"/>
               <a:t>第 </a:t>
             </a:r>
             <a:r>
-              <a:rPr kumimoji="1" lang="en-US" altLang="ja-JP" smtClean="0"/>
+              <a:rPr kumimoji="1" lang="en-US" altLang="ja-JP"/>
               <a:t>2 </a:t>
             </a:r>
             <a:r>
-              <a:rPr kumimoji="1" lang="ja-JP" altLang="en-US" smtClean="0"/>
+              <a:rPr kumimoji="1" lang="ja-JP" altLang="en-US"/>
               <a:t>レベル</a:t>
             </a:r>
           </a:p>
           <a:p>
             <a:pPr lvl="2"/>
             <a:r>
-              <a:rPr kumimoji="1" lang="ja-JP" altLang="en-US" smtClean="0"/>
+              <a:rPr kumimoji="1" lang="ja-JP" altLang="en-US"/>
               <a:t>第 </a:t>
             </a:r>
             <a:r>
-              <a:rPr kumimoji="1" lang="en-US" altLang="ja-JP" smtClean="0"/>
+              <a:rPr kumimoji="1" lang="en-US" altLang="ja-JP"/>
               <a:t>3 </a:t>
             </a:r>
             <a:r>
-              <a:rPr kumimoji="1" lang="ja-JP" altLang="en-US" smtClean="0"/>
+              <a:rPr kumimoji="1" lang="ja-JP" altLang="en-US"/>
               <a:t>レベル</a:t>
             </a:r>
           </a:p>
           <a:p>
             <a:pPr lvl="3"/>
             <a:r>
-              <a:rPr kumimoji="1" lang="ja-JP" altLang="en-US" smtClean="0"/>
+              <a:rPr kumimoji="1" lang="ja-JP" altLang="en-US"/>
               <a:t>第 </a:t>
             </a:r>
             <a:r>
-              <a:rPr kumimoji="1" lang="en-US" altLang="ja-JP" smtClean="0"/>
+              <a:rPr kumimoji="1" lang="en-US" altLang="ja-JP"/>
               <a:t>4 </a:t>
             </a:r>
             <a:r>
-              <a:rPr kumimoji="1" lang="ja-JP" altLang="en-US" smtClean="0"/>
+              <a:rPr kumimoji="1" lang="ja-JP" altLang="en-US"/>
               <a:t>レベル</a:t>
             </a:r>
           </a:p>
           <a:p>
             <a:pPr lvl="4"/>
             <a:r>
-              <a:rPr kumimoji="1" lang="ja-JP" altLang="en-US" smtClean="0"/>
+              <a:rPr kumimoji="1" lang="ja-JP" altLang="en-US"/>
               <a:t>第 </a:t>
             </a:r>
             <a:r>
-              <a:rPr kumimoji="1" lang="en-US" altLang="ja-JP" smtClean="0"/>
+              <a:rPr kumimoji="1" lang="en-US" altLang="ja-JP"/>
               <a:t>5 </a:t>
             </a:r>
             <a:r>
-              <a:rPr kumimoji="1" lang="ja-JP" altLang="en-US" smtClean="0"/>
+              <a:rPr kumimoji="1" lang="ja-JP" altLang="en-US"/>
               <a:t>レベル</a:t>
             </a:r>
-            <a:endParaRPr kumimoji="1" lang="ja-JP" altLang="en-US"/>
           </a:p>
         </p:txBody>
       </p:sp>
@@ -1801,70 +1805,69 @@
           <a:p>
             <a:pPr lvl="0"/>
             <a:r>
-              <a:rPr kumimoji="1" lang="ja-JP" altLang="en-US" smtClean="0"/>
+              <a:rPr kumimoji="1" lang="ja-JP" altLang="en-US"/>
               <a:t>マスタ テキストの書式設定</a:t>
             </a:r>
           </a:p>
           <a:p>
             <a:pPr lvl="1"/>
             <a:r>
-              <a:rPr kumimoji="1" lang="ja-JP" altLang="en-US" smtClean="0"/>
+              <a:rPr kumimoji="1" lang="ja-JP" altLang="en-US"/>
               <a:t>第 </a:t>
             </a:r>
             <a:r>
-              <a:rPr kumimoji="1" lang="en-US" altLang="ja-JP" smtClean="0"/>
+              <a:rPr kumimoji="1" lang="en-US" altLang="ja-JP"/>
               <a:t>2 </a:t>
             </a:r>
             <a:r>
-              <a:rPr kumimoji="1" lang="ja-JP" altLang="en-US" smtClean="0"/>
+              <a:rPr kumimoji="1" lang="ja-JP" altLang="en-US"/>
               <a:t>レベル</a:t>
             </a:r>
           </a:p>
           <a:p>
             <a:pPr lvl="2"/>
             <a:r>
-              <a:rPr kumimoji="1" lang="ja-JP" altLang="en-US" smtClean="0"/>
+              <a:rPr kumimoji="1" lang="ja-JP" altLang="en-US"/>
               <a:t>第 </a:t>
             </a:r>
             <a:r>
-              <a:rPr kumimoji="1" lang="en-US" altLang="ja-JP" smtClean="0"/>
+              <a:rPr kumimoji="1" lang="en-US" altLang="ja-JP"/>
               <a:t>3 </a:t>
             </a:r>
             <a:r>
-              <a:rPr kumimoji="1" lang="ja-JP" altLang="en-US" smtClean="0"/>
+              <a:rPr kumimoji="1" lang="ja-JP" altLang="en-US"/>
               <a:t>レベル</a:t>
             </a:r>
           </a:p>
           <a:p>
             <a:pPr lvl="3"/>
             <a:r>
-              <a:rPr kumimoji="1" lang="ja-JP" altLang="en-US" smtClean="0"/>
+              <a:rPr kumimoji="1" lang="ja-JP" altLang="en-US"/>
               <a:t>第 </a:t>
             </a:r>
             <a:r>
-              <a:rPr kumimoji="1" lang="en-US" altLang="ja-JP" smtClean="0"/>
+              <a:rPr kumimoji="1" lang="en-US" altLang="ja-JP"/>
               <a:t>4 </a:t>
             </a:r>
             <a:r>
-              <a:rPr kumimoji="1" lang="ja-JP" altLang="en-US" smtClean="0"/>
+              <a:rPr kumimoji="1" lang="ja-JP" altLang="en-US"/>
               <a:t>レベル</a:t>
             </a:r>
           </a:p>
           <a:p>
             <a:pPr lvl="4"/>
             <a:r>
-              <a:rPr kumimoji="1" lang="ja-JP" altLang="en-US" smtClean="0"/>
+              <a:rPr kumimoji="1" lang="ja-JP" altLang="en-US"/>
               <a:t>第 </a:t>
             </a:r>
             <a:r>
-              <a:rPr kumimoji="1" lang="en-US" altLang="ja-JP" smtClean="0"/>
+              <a:rPr kumimoji="1" lang="en-US" altLang="ja-JP"/>
               <a:t>5 </a:t>
             </a:r>
             <a:r>
-              <a:rPr kumimoji="1" lang="ja-JP" altLang="en-US" smtClean="0"/>
+              <a:rPr kumimoji="1" lang="ja-JP" altLang="en-US"/>
               <a:t>レベル</a:t>
             </a:r>
-            <a:endParaRPr kumimoji="1" lang="ja-JP" altLang="en-US"/>
           </a:p>
         </p:txBody>
       </p:sp>
@@ -1886,7 +1889,7 @@
             <a:fld id="{E90ED720-0104-4369-84BC-D37694168613}" type="datetimeFigureOut">
               <a:rPr kumimoji="1" lang="ja-JP" altLang="en-US" smtClean="0"/>
               <a:pPr/>
-              <a:t>16/10/25</a:t>
+              <a:t>2026/9/28</a:t>
             </a:fld>
             <a:endParaRPr kumimoji="1" lang="ja-JP" altLang="en-US"/>
           </a:p>
@@ -1980,10 +1983,9 @@
           </a:lstStyle>
           <a:p>
             <a:r>
-              <a:rPr kumimoji="1" lang="ja-JP" altLang="en-US" smtClean="0"/>
+              <a:rPr kumimoji="1" lang="ja-JP" altLang="en-US"/>
               <a:t>マスタ タイトルの書式設定</a:t>
             </a:r>
-            <a:endParaRPr kumimoji="1" lang="ja-JP" altLang="en-US"/>
           </a:p>
         </p:txBody>
       </p:sp>
@@ -2046,7 +2048,7 @@
           <a:p>
             <a:pPr lvl="0"/>
             <a:r>
-              <a:rPr kumimoji="1" lang="ja-JP" altLang="en-US" smtClean="0"/>
+              <a:rPr kumimoji="1" lang="ja-JP" altLang="en-US"/>
               <a:t>マスタ テキストの書式設定</a:t>
             </a:r>
           </a:p>
@@ -2102,70 +2104,69 @@
           <a:p>
             <a:pPr lvl="0"/>
             <a:r>
-              <a:rPr kumimoji="1" lang="ja-JP" altLang="en-US" smtClean="0"/>
+              <a:rPr kumimoji="1" lang="ja-JP" altLang="en-US"/>
               <a:t>マスタ テキストの書式設定</a:t>
             </a:r>
           </a:p>
           <a:p>
             <a:pPr lvl="1"/>
             <a:r>
-              <a:rPr kumimoji="1" lang="ja-JP" altLang="en-US" smtClean="0"/>
+              <a:rPr kumimoji="1" lang="ja-JP" altLang="en-US"/>
               <a:t>第 </a:t>
             </a:r>
             <a:r>
-              <a:rPr kumimoji="1" lang="en-US" altLang="ja-JP" smtClean="0"/>
+              <a:rPr kumimoji="1" lang="en-US" altLang="ja-JP"/>
               <a:t>2 </a:t>
             </a:r>
             <a:r>
-              <a:rPr kumimoji="1" lang="ja-JP" altLang="en-US" smtClean="0"/>
+              <a:rPr kumimoji="1" lang="ja-JP" altLang="en-US"/>
               <a:t>レベル</a:t>
             </a:r>
           </a:p>
           <a:p>
             <a:pPr lvl="2"/>
             <a:r>
-              <a:rPr kumimoji="1" lang="ja-JP" altLang="en-US" smtClean="0"/>
+              <a:rPr kumimoji="1" lang="ja-JP" altLang="en-US"/>
               <a:t>第 </a:t>
             </a:r>
             <a:r>
-              <a:rPr kumimoji="1" lang="en-US" altLang="ja-JP" smtClean="0"/>
+              <a:rPr kumimoji="1" lang="en-US" altLang="ja-JP"/>
               <a:t>3 </a:t>
             </a:r>
             <a:r>
-              <a:rPr kumimoji="1" lang="ja-JP" altLang="en-US" smtClean="0"/>
+              <a:rPr kumimoji="1" lang="ja-JP" altLang="en-US"/>
               <a:t>レベル</a:t>
             </a:r>
           </a:p>
           <a:p>
             <a:pPr lvl="3"/>
             <a:r>
-              <a:rPr kumimoji="1" lang="ja-JP" altLang="en-US" smtClean="0"/>
+              <a:rPr kumimoji="1" lang="ja-JP" altLang="en-US"/>
               <a:t>第 </a:t>
             </a:r>
             <a:r>
-              <a:rPr kumimoji="1" lang="en-US" altLang="ja-JP" smtClean="0"/>
+              <a:rPr kumimoji="1" lang="en-US" altLang="ja-JP"/>
               <a:t>4 </a:t>
             </a:r>
             <a:r>
-              <a:rPr kumimoji="1" lang="ja-JP" altLang="en-US" smtClean="0"/>
+              <a:rPr kumimoji="1" lang="ja-JP" altLang="en-US"/>
               <a:t>レベル</a:t>
             </a:r>
           </a:p>
           <a:p>
             <a:pPr lvl="4"/>
             <a:r>
-              <a:rPr kumimoji="1" lang="ja-JP" altLang="en-US" smtClean="0"/>
+              <a:rPr kumimoji="1" lang="ja-JP" altLang="en-US"/>
               <a:t>第 </a:t>
             </a:r>
             <a:r>
-              <a:rPr kumimoji="1" lang="en-US" altLang="ja-JP" smtClean="0"/>
+              <a:rPr kumimoji="1" lang="en-US" altLang="ja-JP"/>
               <a:t>5 </a:t>
             </a:r>
             <a:r>
-              <a:rPr kumimoji="1" lang="ja-JP" altLang="en-US" smtClean="0"/>
+              <a:rPr kumimoji="1" lang="ja-JP" altLang="en-US"/>
               <a:t>レベル</a:t>
             </a:r>
-            <a:endParaRPr kumimoji="1" lang="ja-JP" altLang="en-US"/>
           </a:p>
         </p:txBody>
       </p:sp>
@@ -2228,7 +2229,7 @@
           <a:p>
             <a:pPr lvl="0"/>
             <a:r>
-              <a:rPr kumimoji="1" lang="ja-JP" altLang="en-US" smtClean="0"/>
+              <a:rPr kumimoji="1" lang="ja-JP" altLang="en-US"/>
               <a:t>マスタ テキストの書式設定</a:t>
             </a:r>
           </a:p>
@@ -2284,70 +2285,69 @@
           <a:p>
             <a:pPr lvl="0"/>
             <a:r>
-              <a:rPr kumimoji="1" lang="ja-JP" altLang="en-US" smtClean="0"/>
+              <a:rPr kumimoji="1" lang="ja-JP" altLang="en-US"/>
               <a:t>マスタ テキストの書式設定</a:t>
             </a:r>
           </a:p>
           <a:p>
             <a:pPr lvl="1"/>
             <a:r>
-              <a:rPr kumimoji="1" lang="ja-JP" altLang="en-US" smtClean="0"/>
+              <a:rPr kumimoji="1" lang="ja-JP" altLang="en-US"/>
               <a:t>第 </a:t>
             </a:r>
             <a:r>
-              <a:rPr kumimoji="1" lang="en-US" altLang="ja-JP" smtClean="0"/>
+              <a:rPr kumimoji="1" lang="en-US" altLang="ja-JP"/>
               <a:t>2 </a:t>
             </a:r>
             <a:r>
-              <a:rPr kumimoji="1" lang="ja-JP" altLang="en-US" smtClean="0"/>
+              <a:rPr kumimoji="1" lang="ja-JP" altLang="en-US"/>
               <a:t>レベル</a:t>
             </a:r>
           </a:p>
           <a:p>
             <a:pPr lvl="2"/>
             <a:r>
-              <a:rPr kumimoji="1" lang="ja-JP" altLang="en-US" smtClean="0"/>
+              <a:rPr kumimoji="1" lang="ja-JP" altLang="en-US"/>
               <a:t>第 </a:t>
             </a:r>
             <a:r>
-              <a:rPr kumimoji="1" lang="en-US" altLang="ja-JP" smtClean="0"/>
+              <a:rPr kumimoji="1" lang="en-US" altLang="ja-JP"/>
               <a:t>3 </a:t>
             </a:r>
             <a:r>
-              <a:rPr kumimoji="1" lang="ja-JP" altLang="en-US" smtClean="0"/>
+              <a:rPr kumimoji="1" lang="ja-JP" altLang="en-US"/>
               <a:t>レベル</a:t>
             </a:r>
           </a:p>
           <a:p>
             <a:pPr lvl="3"/>
             <a:r>
-              <a:rPr kumimoji="1" lang="ja-JP" altLang="en-US" smtClean="0"/>
+              <a:rPr kumimoji="1" lang="ja-JP" altLang="en-US"/>
               <a:t>第 </a:t>
             </a:r>
             <a:r>
-              <a:rPr kumimoji="1" lang="en-US" altLang="ja-JP" smtClean="0"/>
+              <a:rPr kumimoji="1" lang="en-US" altLang="ja-JP"/>
               <a:t>4 </a:t>
             </a:r>
             <a:r>
-              <a:rPr kumimoji="1" lang="ja-JP" altLang="en-US" smtClean="0"/>
+              <a:rPr kumimoji="1" lang="ja-JP" altLang="en-US"/>
               <a:t>レベル</a:t>
             </a:r>
           </a:p>
           <a:p>
             <a:pPr lvl="4"/>
             <a:r>
-              <a:rPr kumimoji="1" lang="ja-JP" altLang="en-US" smtClean="0"/>
+              <a:rPr kumimoji="1" lang="ja-JP" altLang="en-US"/>
               <a:t>第 </a:t>
             </a:r>
             <a:r>
-              <a:rPr kumimoji="1" lang="en-US" altLang="ja-JP" smtClean="0"/>
+              <a:rPr kumimoji="1" lang="en-US" altLang="ja-JP"/>
               <a:t>5 </a:t>
             </a:r>
             <a:r>
-              <a:rPr kumimoji="1" lang="ja-JP" altLang="en-US" smtClean="0"/>
+              <a:rPr kumimoji="1" lang="ja-JP" altLang="en-US"/>
               <a:t>レベル</a:t>
             </a:r>
-            <a:endParaRPr kumimoji="1" lang="ja-JP" altLang="en-US"/>
           </a:p>
         </p:txBody>
       </p:sp>
@@ -2369,7 +2369,7 @@
             <a:fld id="{E90ED720-0104-4369-84BC-D37694168613}" type="datetimeFigureOut">
               <a:rPr kumimoji="1" lang="ja-JP" altLang="en-US" smtClean="0"/>
               <a:pPr/>
-              <a:t>16/10/25</a:t>
+              <a:t>2026/9/28</a:t>
             </a:fld>
             <a:endParaRPr kumimoji="1" lang="ja-JP" altLang="en-US"/>
           </a:p>
@@ -2459,10 +2459,9 @@
           <a:lstStyle/>
           <a:p>
             <a:r>
-              <a:rPr kumimoji="1" lang="ja-JP" altLang="en-US" smtClean="0"/>
+              <a:rPr kumimoji="1" lang="ja-JP" altLang="en-US"/>
               <a:t>マスタ タイトルの書式設定</a:t>
             </a:r>
-            <a:endParaRPr kumimoji="1" lang="ja-JP" altLang="en-US"/>
           </a:p>
         </p:txBody>
       </p:sp>
@@ -2484,7 +2483,7 @@
             <a:fld id="{E90ED720-0104-4369-84BC-D37694168613}" type="datetimeFigureOut">
               <a:rPr kumimoji="1" lang="ja-JP" altLang="en-US" smtClean="0"/>
               <a:pPr/>
-              <a:t>16/10/25</a:t>
+              <a:t>2026/9/28</a:t>
             </a:fld>
             <a:endParaRPr kumimoji="1" lang="ja-JP" altLang="en-US"/>
           </a:p>
@@ -2576,7 +2575,7 @@
             <a:fld id="{E90ED720-0104-4369-84BC-D37694168613}" type="datetimeFigureOut">
               <a:rPr kumimoji="1" lang="ja-JP" altLang="en-US" smtClean="0"/>
               <a:pPr/>
-              <a:t>16/10/25</a:t>
+              <a:t>2026/9/28</a:t>
             </a:fld>
             <a:endParaRPr kumimoji="1" lang="ja-JP" altLang="en-US"/>
           </a:p>
@@ -2675,10 +2674,9 @@
           </a:lstStyle>
           <a:p>
             <a:r>
-              <a:rPr kumimoji="1" lang="ja-JP" altLang="en-US" smtClean="0"/>
+              <a:rPr kumimoji="1" lang="ja-JP" altLang="en-US"/>
               <a:t>マスタ タイトルの書式設定</a:t>
             </a:r>
-            <a:endParaRPr kumimoji="1" lang="ja-JP" altLang="en-US"/>
           </a:p>
         </p:txBody>
       </p:sp>
@@ -2732,70 +2730,69 @@
           <a:p>
             <a:pPr lvl="0"/>
             <a:r>
-              <a:rPr kumimoji="1" lang="ja-JP" altLang="en-US" smtClean="0"/>
+              <a:rPr kumimoji="1" lang="ja-JP" altLang="en-US"/>
               <a:t>マスタ テキストの書式設定</a:t>
             </a:r>
           </a:p>
           <a:p>
             <a:pPr lvl="1"/>
             <a:r>
-              <a:rPr kumimoji="1" lang="ja-JP" altLang="en-US" smtClean="0"/>
+              <a:rPr kumimoji="1" lang="ja-JP" altLang="en-US"/>
               <a:t>第 </a:t>
             </a:r>
             <a:r>
-              <a:rPr kumimoji="1" lang="en-US" altLang="ja-JP" smtClean="0"/>
+              <a:rPr kumimoji="1" lang="en-US" altLang="ja-JP"/>
               <a:t>2 </a:t>
             </a:r>
             <a:r>
-              <a:rPr kumimoji="1" lang="ja-JP" altLang="en-US" smtClean="0"/>
+              <a:rPr kumimoji="1" lang="ja-JP" altLang="en-US"/>
               <a:t>レベル</a:t>
             </a:r>
           </a:p>
           <a:p>
             <a:pPr lvl="2"/>
             <a:r>
-              <a:rPr kumimoji="1" lang="ja-JP" altLang="en-US" smtClean="0"/>
+              <a:rPr kumimoji="1" lang="ja-JP" altLang="en-US"/>
               <a:t>第 </a:t>
             </a:r>
             <a:r>
-              <a:rPr kumimoji="1" lang="en-US" altLang="ja-JP" smtClean="0"/>
+              <a:rPr kumimoji="1" lang="en-US" altLang="ja-JP"/>
               <a:t>3 </a:t>
             </a:r>
             <a:r>
-              <a:rPr kumimoji="1" lang="ja-JP" altLang="en-US" smtClean="0"/>
+              <a:rPr kumimoji="1" lang="ja-JP" altLang="en-US"/>
               <a:t>レベル</a:t>
             </a:r>
           </a:p>
           <a:p>
             <a:pPr lvl="3"/>
             <a:r>
-              <a:rPr kumimoji="1" lang="ja-JP" altLang="en-US" smtClean="0"/>
+              <a:rPr kumimoji="1" lang="ja-JP" altLang="en-US"/>
               <a:t>第 </a:t>
             </a:r>
             <a:r>
-              <a:rPr kumimoji="1" lang="en-US" altLang="ja-JP" smtClean="0"/>
+              <a:rPr kumimoji="1" lang="en-US" altLang="ja-JP"/>
               <a:t>4 </a:t>
             </a:r>
             <a:r>
-              <a:rPr kumimoji="1" lang="ja-JP" altLang="en-US" smtClean="0"/>
+              <a:rPr kumimoji="1" lang="ja-JP" altLang="en-US"/>
               <a:t>レベル</a:t>
             </a:r>
           </a:p>
           <a:p>
             <a:pPr lvl="4"/>
             <a:r>
-              <a:rPr kumimoji="1" lang="ja-JP" altLang="en-US" smtClean="0"/>
+              <a:rPr kumimoji="1" lang="ja-JP" altLang="en-US"/>
               <a:t>第 </a:t>
             </a:r>
             <a:r>
-              <a:rPr kumimoji="1" lang="en-US" altLang="ja-JP" smtClean="0"/>
+              <a:rPr kumimoji="1" lang="en-US" altLang="ja-JP"/>
               <a:t>5 </a:t>
             </a:r>
             <a:r>
-              <a:rPr kumimoji="1" lang="ja-JP" altLang="en-US" smtClean="0"/>
+              <a:rPr kumimoji="1" lang="ja-JP" altLang="en-US"/>
               <a:t>レベル</a:t>
             </a:r>
-            <a:endParaRPr kumimoji="1" lang="ja-JP" altLang="en-US"/>
           </a:p>
         </p:txBody>
       </p:sp>
@@ -2858,7 +2855,7 @@
           <a:p>
             <a:pPr lvl="0"/>
             <a:r>
-              <a:rPr kumimoji="1" lang="ja-JP" altLang="en-US" smtClean="0"/>
+              <a:rPr kumimoji="1" lang="ja-JP" altLang="en-US"/>
               <a:t>マスタ テキストの書式設定</a:t>
             </a:r>
           </a:p>
@@ -2882,7 +2879,7 @@
             <a:fld id="{E90ED720-0104-4369-84BC-D37694168613}" type="datetimeFigureOut">
               <a:rPr kumimoji="1" lang="ja-JP" altLang="en-US" smtClean="0"/>
               <a:pPr/>
-              <a:t>16/10/25</a:t>
+              <a:t>2026/9/28</a:t>
             </a:fld>
             <a:endParaRPr kumimoji="1" lang="ja-JP" altLang="en-US"/>
           </a:p>
@@ -2981,10 +2978,9 @@
           </a:lstStyle>
           <a:p>
             <a:r>
-              <a:rPr kumimoji="1" lang="ja-JP" altLang="en-US" smtClean="0"/>
+              <a:rPr kumimoji="1" lang="ja-JP" altLang="en-US"/>
               <a:t>マスタ タイトルの書式設定</a:t>
             </a:r>
-            <a:endParaRPr kumimoji="1" lang="ja-JP" altLang="en-US"/>
           </a:p>
         </p:txBody>
       </p:sp>
@@ -3108,7 +3104,7 @@
           <a:p>
             <a:pPr lvl="0"/>
             <a:r>
-              <a:rPr kumimoji="1" lang="ja-JP" altLang="en-US" smtClean="0"/>
+              <a:rPr kumimoji="1" lang="ja-JP" altLang="en-US"/>
               <a:t>マスタ テキストの書式設定</a:t>
             </a:r>
           </a:p>
@@ -3132,7 +3128,7 @@
             <a:fld id="{E90ED720-0104-4369-84BC-D37694168613}" type="datetimeFigureOut">
               <a:rPr kumimoji="1" lang="ja-JP" altLang="en-US" smtClean="0"/>
               <a:pPr/>
-              <a:t>16/10/25</a:t>
+              <a:t>2026/9/28</a:t>
             </a:fld>
             <a:endParaRPr kumimoji="1" lang="ja-JP" altLang="en-US"/>
           </a:p>
@@ -3237,10 +3233,9 @@
           <a:lstStyle/>
           <a:p>
             <a:r>
-              <a:rPr kumimoji="1" lang="ja-JP" altLang="en-US" smtClean="0"/>
+              <a:rPr kumimoji="1" lang="ja-JP" altLang="en-US"/>
               <a:t>マスタ タイトルの書式設定</a:t>
             </a:r>
-            <a:endParaRPr kumimoji="1" lang="ja-JP" altLang="en-US"/>
           </a:p>
         </p:txBody>
       </p:sp>
@@ -3271,70 +3266,69 @@
           <a:p>
             <a:pPr lvl="0"/>
             <a:r>
-              <a:rPr kumimoji="1" lang="ja-JP" altLang="en-US" smtClean="0"/>
+              <a:rPr kumimoji="1" lang="ja-JP" altLang="en-US"/>
               <a:t>マスタ テキストの書式設定</a:t>
             </a:r>
           </a:p>
           <a:p>
             <a:pPr lvl="1"/>
             <a:r>
-              <a:rPr kumimoji="1" lang="ja-JP" altLang="en-US" smtClean="0"/>
+              <a:rPr kumimoji="1" lang="ja-JP" altLang="en-US"/>
               <a:t>第 </a:t>
             </a:r>
             <a:r>
-              <a:rPr kumimoji="1" lang="en-US" altLang="ja-JP" smtClean="0"/>
+              <a:rPr kumimoji="1" lang="en-US" altLang="ja-JP"/>
               <a:t>2 </a:t>
             </a:r>
             <a:r>
-              <a:rPr kumimoji="1" lang="ja-JP" altLang="en-US" smtClean="0"/>
+              <a:rPr kumimoji="1" lang="ja-JP" altLang="en-US"/>
               <a:t>レベル</a:t>
             </a:r>
           </a:p>
           <a:p>
             <a:pPr lvl="2"/>
             <a:r>
-              <a:rPr kumimoji="1" lang="ja-JP" altLang="en-US" smtClean="0"/>
+              <a:rPr kumimoji="1" lang="ja-JP" altLang="en-US"/>
               <a:t>第 </a:t>
             </a:r>
             <a:r>
-              <a:rPr kumimoji="1" lang="en-US" altLang="ja-JP" smtClean="0"/>
+              <a:rPr kumimoji="1" lang="en-US" altLang="ja-JP"/>
               <a:t>3 </a:t>
             </a:r>
             <a:r>
-              <a:rPr kumimoji="1" lang="ja-JP" altLang="en-US" smtClean="0"/>
+              <a:rPr kumimoji="1" lang="ja-JP" altLang="en-US"/>
               <a:t>レベル</a:t>
             </a:r>
           </a:p>
           <a:p>
             <a:pPr lvl="3"/>
             <a:r>
-              <a:rPr kumimoji="1" lang="ja-JP" altLang="en-US" smtClean="0"/>
+              <a:rPr kumimoji="1" lang="ja-JP" altLang="en-US"/>
               <a:t>第 </a:t>
             </a:r>
             <a:r>
-              <a:rPr kumimoji="1" lang="en-US" altLang="ja-JP" smtClean="0"/>
+              <a:rPr kumimoji="1" lang="en-US" altLang="ja-JP"/>
               <a:t>4 </a:t>
             </a:r>
             <a:r>
-              <a:rPr kumimoji="1" lang="ja-JP" altLang="en-US" smtClean="0"/>
+              <a:rPr kumimoji="1" lang="ja-JP" altLang="en-US"/>
               <a:t>レベル</a:t>
             </a:r>
           </a:p>
           <a:p>
             <a:pPr lvl="4"/>
             <a:r>
-              <a:rPr kumimoji="1" lang="ja-JP" altLang="en-US" smtClean="0"/>
+              <a:rPr kumimoji="1" lang="ja-JP" altLang="en-US"/>
               <a:t>第 </a:t>
             </a:r>
             <a:r>
-              <a:rPr kumimoji="1" lang="en-US" altLang="ja-JP" smtClean="0"/>
+              <a:rPr kumimoji="1" lang="en-US" altLang="ja-JP"/>
               <a:t>5 </a:t>
             </a:r>
             <a:r>
-              <a:rPr kumimoji="1" lang="ja-JP" altLang="en-US" smtClean="0"/>
+              <a:rPr kumimoji="1" lang="ja-JP" altLang="en-US"/>
               <a:t>レベル</a:t>
             </a:r>
-            <a:endParaRPr kumimoji="1" lang="ja-JP" altLang="en-US"/>
           </a:p>
         </p:txBody>
       </p:sp>
@@ -3374,7 +3368,7 @@
             <a:fld id="{E90ED720-0104-4369-84BC-D37694168613}" type="datetimeFigureOut">
               <a:rPr kumimoji="1" lang="ja-JP" altLang="en-US" smtClean="0"/>
               <a:pPr/>
-              <a:t>16/10/25</a:t>
+              <a:t>2026/9/28</a:t>
             </a:fld>
             <a:endParaRPr kumimoji="1" lang="ja-JP" altLang="en-US"/>
           </a:p>
@@ -3768,37 +3762,29 @@
           <a:lstStyle/>
           <a:p>
             <a:r>
-              <a:rPr kumimoji="1" lang="ja-JP" altLang="en-US" dirty="0" smtClean="0"/>
+              <a:rPr kumimoji="1" lang="ja-JP" altLang="en-US" dirty="0"/>
               <a:t>プログラミング言語論</a:t>
             </a:r>
-            <a:r>
-              <a:rPr kumimoji="1" lang="en-US" altLang="ja-JP" dirty="0" smtClean="0"/>
-              <a:t/>
-            </a:r>
             <a:br>
-              <a:rPr kumimoji="1" lang="en-US" altLang="ja-JP" dirty="0" smtClean="0"/>
+              <a:rPr kumimoji="1" lang="en-US" altLang="ja-JP" dirty="0"/>
             </a:br>
             <a:r>
-              <a:rPr lang="ja-JP" altLang="en-US" dirty="0" smtClean="0"/>
+              <a:rPr lang="ja-JP" altLang="en-US" dirty="0"/>
               <a:t>第</a:t>
             </a:r>
             <a:r>
-              <a:rPr lang="en-US" altLang="ja-JP" dirty="0" smtClean="0"/>
+              <a:rPr lang="en-US" altLang="ja-JP" dirty="0"/>
               <a:t>3</a:t>
             </a:r>
             <a:r>
-              <a:rPr lang="ja-JP" altLang="en-US" dirty="0" smtClean="0"/>
+              <a:rPr lang="ja-JP" altLang="en-US" dirty="0"/>
               <a:t>回</a:t>
             </a:r>
-            <a:r>
-              <a:rPr lang="en-US" altLang="ja-JP" dirty="0" smtClean="0"/>
-              <a:t/>
-            </a:r>
             <a:br>
-              <a:rPr lang="en-US" altLang="ja-JP" dirty="0" smtClean="0"/>
+              <a:rPr lang="en-US" altLang="ja-JP" dirty="0"/>
             </a:br>
             <a:r>
-              <a:rPr lang="ja-JP" altLang="en-US" dirty="0" smtClean="0"/>
+              <a:rPr lang="ja-JP" altLang="en-US" dirty="0"/>
               <a:t>練習問題解答例</a:t>
             </a:r>
             <a:endParaRPr kumimoji="1" lang="ja-JP" altLang="en-US" dirty="0"/>
@@ -3813,8 +3799,8 @@
         </p:nvSpPr>
         <p:spPr>
           <a:xfrm>
-            <a:off x="2442508" y="5447813"/>
-            <a:ext cx="4112023" cy="584775"/>
+            <a:off x="3756858" y="5222348"/>
+            <a:ext cx="1688283" cy="584775"/>
           </a:xfrm>
           <a:prstGeom prst="rect">
             <a:avLst/>
@@ -3827,19 +3813,15 @@
           </a:bodyPr>
           <a:lstStyle/>
           <a:p>
-            <a:r>
-              <a:rPr kumimoji="1" lang="ja-JP" altLang="en-US" sz="3200" dirty="0" smtClean="0"/>
-              <a:t>情報工学科</a:t>
-            </a:r>
-            <a:r>
-              <a:rPr lang="ja-JP" altLang="en-US" sz="3200" dirty="0" smtClean="0"/>
-              <a:t>    </a:t>
-            </a:r>
-            <a:r>
-              <a:rPr kumimoji="1" lang="ja-JP" altLang="en-US" sz="3200" dirty="0" smtClean="0"/>
-              <a:t>篠埜　功</a:t>
-            </a:r>
-            <a:endParaRPr kumimoji="1" lang="ja-JP" altLang="en-US" sz="3200" dirty="0"/>
+            <a:pPr algn="ctr"/>
+            <a:r>
+              <a:rPr kumimoji="1" lang="ja-JP" altLang="en-US" sz="3200"/>
+              <a:t>篠埜　</a:t>
+            </a:r>
+            <a:r>
+              <a:rPr kumimoji="1" lang="ja-JP" altLang="en-US" sz="3200" dirty="0"/>
+              <a:t>功</a:t>
+            </a:r>
           </a:p>
         </p:txBody>
       </p:sp>
@@ -3848,13 +3830,6 @@
   <p:clrMapOvr>
     <a:masterClrMapping/>
   </p:clrMapOvr>
-  <p:timing>
-    <p:tnLst>
-      <p:par>
-        <p:cTn xmlns:p14="http://schemas.microsoft.com/office/powerpoint/2010/main" id="1" dur="indefinite" restart="never" nodeType="tmRoot"/>
-      </p:par>
-    </p:tnLst>
-  </p:timing>
 </p:sld>
 </file>
 
@@ -3891,11 +3866,11 @@
           <a:lstStyle/>
           <a:p>
             <a:r>
-              <a:rPr lang="en-US" altLang="ja-JP" dirty="0" smtClean="0"/>
+              <a:rPr lang="en-US" altLang="ja-JP" dirty="0"/>
               <a:t>(3) </a:t>
             </a:r>
             <a:r>
-              <a:rPr lang="ja-JP" altLang="en-US" dirty="0" smtClean="0"/>
+              <a:rPr lang="ja-JP" altLang="en-US" dirty="0"/>
               <a:t>解答</a:t>
             </a:r>
             <a:endParaRPr kumimoji="1" lang="ja-JP" altLang="en-US" dirty="0"/>
@@ -3960,43 +3935,31 @@
           <a:p>
             <a:pPr marL="514350" indent="-514350"/>
             <a:r>
-              <a:rPr lang="en-US" altLang="ja-JP" sz="2400" dirty="0" smtClean="0"/>
+              <a:rPr lang="en-US" altLang="ja-JP" sz="2400" dirty="0"/>
               <a:t>{ a = 1 } </a:t>
             </a:r>
             <a:r>
-              <a:rPr lang="en-US" altLang="ja-JP" sz="2400" b="1" dirty="0" smtClean="0"/>
+              <a:rPr lang="en-US" altLang="ja-JP" sz="2400" b="1" dirty="0"/>
               <a:t>while</a:t>
             </a:r>
             <a:r>
-              <a:rPr lang="en-US" altLang="ja-JP" sz="2400" dirty="0" smtClean="0"/>
+              <a:rPr lang="en-US" altLang="ja-JP" sz="2400" dirty="0"/>
+              <a:t> a &lt; 5 </a:t>
+            </a:r>
+            <a:r>
+              <a:rPr lang="en-US" altLang="ja-JP" sz="2400" b="1" dirty="0"/>
+              <a:t>do</a:t>
+            </a:r>
+            <a:r>
+              <a:rPr lang="en-US" altLang="ja-JP" sz="2400" dirty="0"/>
+              <a:t> a := a + 1 </a:t>
+            </a:r>
+            <a:r>
+              <a:rPr lang="ja-JP" altLang="en-US" sz="2400" dirty="0"/>
               <a:t> </a:t>
             </a:r>
             <a:r>
-              <a:rPr lang="en-US" altLang="ja-JP" sz="2400" dirty="0" smtClean="0"/>
-              <a:t>a </a:t>
-            </a:r>
-            <a:r>
-              <a:rPr lang="en-US" altLang="ja-JP" sz="2400" dirty="0" smtClean="0"/>
-              <a:t>&lt; </a:t>
-            </a:r>
-            <a:r>
-              <a:rPr lang="en-US" altLang="ja-JP" sz="2400" dirty="0" smtClean="0"/>
-              <a:t>5 </a:t>
-            </a:r>
-            <a:r>
-              <a:rPr lang="en-US" altLang="ja-JP" sz="2400" b="1" dirty="0" smtClean="0"/>
-              <a:t>do</a:t>
-            </a:r>
-            <a:r>
-              <a:rPr lang="en-US" altLang="ja-JP" sz="2400" dirty="0" smtClean="0"/>
-              <a:t> a := a + 1 </a:t>
-            </a:r>
-            <a:r>
-              <a:rPr lang="ja-JP" altLang="en-US" sz="2400" dirty="0" smtClean="0"/>
-              <a:t> </a:t>
-            </a:r>
-            <a:r>
-              <a:rPr lang="en-US" altLang="ja-JP" sz="2400" dirty="0" smtClean="0"/>
+              <a:rPr lang="en-US" altLang="ja-JP" sz="2400" dirty="0"/>
               <a:t>{ a = 5 }</a:t>
             </a:r>
           </a:p>
@@ -4025,102 +3988,90 @@
           <a:p>
             <a:pPr marL="514350" indent="-514350"/>
             <a:r>
-              <a:rPr lang="en-US" altLang="ja-JP" sz="2000" dirty="0" smtClean="0"/>
+              <a:rPr lang="en-US" altLang="ja-JP" sz="2000" dirty="0"/>
               <a:t> a=1 </a:t>
             </a:r>
             <a:r>
-              <a:rPr lang="en-US" altLang="ja-JP" sz="2000" dirty="0" smtClean="0">
+              <a:rPr lang="en-US" altLang="ja-JP" sz="2000" dirty="0">
                 <a:sym typeface="Symbol"/>
               </a:rPr>
               <a:t> a5     </a:t>
             </a:r>
             <a:r>
-              <a:rPr lang="en-US" altLang="ja-JP" sz="2000" dirty="0" smtClean="0"/>
+              <a:rPr lang="en-US" altLang="ja-JP" sz="2000" dirty="0"/>
               <a:t>{a</a:t>
             </a:r>
             <a:r>
-              <a:rPr lang="en-US" altLang="ja-JP" sz="2000" dirty="0" smtClean="0">
+              <a:rPr lang="en-US" altLang="ja-JP" sz="2000" dirty="0">
                 <a:sym typeface="Symbol"/>
               </a:rPr>
               <a:t>5</a:t>
             </a:r>
             <a:r>
-              <a:rPr lang="en-US" altLang="ja-JP" sz="2000" dirty="0" smtClean="0"/>
+              <a:rPr lang="en-US" altLang="ja-JP" sz="2000" dirty="0"/>
               <a:t>} </a:t>
             </a:r>
             <a:r>
-              <a:rPr lang="en-US" altLang="ja-JP" sz="2000" b="1" dirty="0" smtClean="0"/>
+              <a:rPr lang="en-US" altLang="ja-JP" sz="2000" b="1" dirty="0"/>
               <a:t>while</a:t>
             </a:r>
             <a:r>
-              <a:rPr lang="en-US" altLang="ja-JP" sz="2000" dirty="0" smtClean="0"/>
+              <a:rPr lang="en-US" altLang="ja-JP" sz="2000" dirty="0"/>
+              <a:t> a&lt;5 </a:t>
+            </a:r>
+            <a:r>
+              <a:rPr lang="en-US" altLang="ja-JP" sz="2000" b="1" dirty="0"/>
+              <a:t>do</a:t>
+            </a:r>
+            <a:r>
+              <a:rPr lang="en-US" altLang="ja-JP" sz="2000" dirty="0"/>
+              <a:t> a := a + 1 </a:t>
+            </a:r>
+            <a:r>
+              <a:rPr lang="ja-JP" altLang="en-US" sz="2000" dirty="0"/>
               <a:t> </a:t>
             </a:r>
             <a:r>
-              <a:rPr lang="en-US" altLang="ja-JP" sz="2000" dirty="0" smtClean="0"/>
-              <a:t>a</a:t>
-            </a:r>
-            <a:r>
-              <a:rPr lang="en-US" altLang="ja-JP" sz="2000" dirty="0" smtClean="0"/>
-              <a:t>&lt;</a:t>
-            </a:r>
-            <a:r>
-              <a:rPr lang="en-US" altLang="ja-JP" sz="2000" dirty="0" smtClean="0"/>
-              <a:t>5 </a:t>
-            </a:r>
-            <a:r>
-              <a:rPr lang="en-US" altLang="ja-JP" sz="2000" b="1" dirty="0" smtClean="0"/>
-              <a:t>do</a:t>
-            </a:r>
-            <a:r>
-              <a:rPr lang="en-US" altLang="ja-JP" sz="2000" dirty="0" smtClean="0"/>
-              <a:t> a := a + 1 </a:t>
-            </a:r>
-            <a:r>
-              <a:rPr lang="ja-JP" altLang="en-US" sz="2000" dirty="0" smtClean="0"/>
-              <a:t> </a:t>
-            </a:r>
-            <a:r>
-              <a:rPr lang="en-US" altLang="ja-JP" sz="2000" dirty="0" smtClean="0"/>
+              <a:rPr lang="en-US" altLang="ja-JP" sz="2000" dirty="0"/>
               <a:t>{a</a:t>
             </a:r>
             <a:r>
-              <a:rPr lang="en-US" altLang="ja-JP" sz="2000" dirty="0" smtClean="0">
+              <a:rPr lang="en-US" altLang="ja-JP" sz="2000" dirty="0">
                 <a:sym typeface="Symbol"/>
               </a:rPr>
               <a:t>5</a:t>
             </a:r>
             <a:r>
-              <a:rPr lang="en-US" altLang="ja-JP" sz="2000" dirty="0" smtClean="0"/>
+              <a:rPr lang="en-US" altLang="ja-JP" sz="2000" dirty="0"/>
               <a:t> </a:t>
             </a:r>
             <a:r>
-              <a:rPr lang="en-US" altLang="ja-JP" sz="2000" dirty="0" smtClean="0">
+              <a:rPr lang="en-US" altLang="ja-JP" sz="2000" dirty="0">
                 <a:sym typeface="Symbol"/>
               </a:rPr>
               <a:t> a&lt;5</a:t>
             </a:r>
             <a:r>
-              <a:rPr lang="en-US" altLang="ja-JP" sz="2000" dirty="0" smtClean="0"/>
+              <a:rPr lang="en-US" altLang="ja-JP" sz="2000" dirty="0"/>
               <a:t>}     (a</a:t>
             </a:r>
             <a:r>
-              <a:rPr lang="en-US" altLang="ja-JP" sz="2000" dirty="0" smtClean="0">
+              <a:rPr lang="en-US" altLang="ja-JP" sz="2000" dirty="0">
                 <a:sym typeface="Symbol"/>
               </a:rPr>
               <a:t>5</a:t>
             </a:r>
             <a:r>
-              <a:rPr lang="en-US" altLang="ja-JP" sz="2000" dirty="0" smtClean="0"/>
+              <a:rPr lang="en-US" altLang="ja-JP" sz="2000" dirty="0"/>
               <a:t> </a:t>
             </a:r>
             <a:r>
-              <a:rPr lang="en-US" altLang="ja-JP" sz="2000" dirty="0" smtClean="0">
+              <a:rPr lang="en-US" altLang="ja-JP" sz="2000" dirty="0">
                 <a:sym typeface="Symbol"/>
               </a:rPr>
               <a:t> a&lt;5)  a=5</a:t>
             </a:r>
-            <a:endParaRPr lang="en-US" altLang="ja-JP" sz="2000" dirty="0" smtClean="0"/>
+            <a:endParaRPr lang="en-US" altLang="ja-JP" sz="2000" dirty="0"/>
           </a:p>
         </p:txBody>
       </p:sp>
@@ -4182,7 +4133,7 @@
           <a:lstStyle/>
           <a:p>
             <a:r>
-              <a:rPr kumimoji="1" lang="en-US" altLang="ja-JP" sz="2000" dirty="0" smtClean="0"/>
+              <a:rPr kumimoji="1" lang="en-US" altLang="ja-JP" sz="2000" dirty="0"/>
               <a:t>(consequence)</a:t>
             </a:r>
             <a:endParaRPr kumimoji="1" lang="ja-JP" altLang="en-US" sz="2000" dirty="0"/>
@@ -4252,7 +4203,7 @@
           <a:lstStyle/>
           <a:p>
             <a:r>
-              <a:rPr kumimoji="1" lang="en-US" altLang="ja-JP" sz="2000" dirty="0" smtClean="0"/>
+              <a:rPr kumimoji="1" lang="en-US" altLang="ja-JP" sz="2000" dirty="0"/>
               <a:t>(while)</a:t>
             </a:r>
             <a:endParaRPr kumimoji="1" lang="ja-JP" altLang="en-US" sz="2000" dirty="0"/>
@@ -4281,45 +4232,45 @@
           <a:lstStyle/>
           <a:p>
             <a:r>
-              <a:rPr lang="en-US" altLang="ja-JP" sz="2400" dirty="0" smtClean="0"/>
+              <a:rPr lang="en-US" altLang="ja-JP" sz="2400" dirty="0"/>
               <a:t>{a</a:t>
             </a:r>
             <a:r>
-              <a:rPr lang="en-US" altLang="ja-JP" sz="2400" dirty="0" smtClean="0">
+              <a:rPr lang="en-US" altLang="ja-JP" sz="2400" dirty="0">
                 <a:sym typeface="Symbol"/>
               </a:rPr>
               <a:t>5</a:t>
             </a:r>
             <a:r>
-              <a:rPr lang="en-US" altLang="ja-JP" sz="2400" dirty="0" smtClean="0"/>
+              <a:rPr lang="en-US" altLang="ja-JP" sz="2400" dirty="0"/>
               <a:t> </a:t>
             </a:r>
             <a:r>
-              <a:rPr lang="en-US" altLang="ja-JP" sz="2400" dirty="0" smtClean="0">
+              <a:rPr lang="en-US" altLang="ja-JP" sz="2400" dirty="0">
                 <a:sym typeface="Symbol"/>
               </a:rPr>
               <a:t> a&lt;5</a:t>
             </a:r>
             <a:r>
-              <a:rPr lang="en-US" altLang="ja-JP" sz="2400" dirty="0" smtClean="0"/>
+              <a:rPr lang="en-US" altLang="ja-JP" sz="2400" dirty="0"/>
               <a:t>}  a := a + 1 </a:t>
             </a:r>
             <a:r>
-              <a:rPr lang="ja-JP" altLang="en-US" sz="2400" dirty="0" smtClean="0"/>
+              <a:rPr lang="ja-JP" altLang="en-US" sz="2400" dirty="0"/>
               <a:t> </a:t>
             </a:r>
             <a:r>
-              <a:rPr lang="en-US" altLang="ja-JP" sz="2400" dirty="0" smtClean="0"/>
+              <a:rPr lang="en-US" altLang="ja-JP" sz="2400" dirty="0"/>
               <a:t>{a</a:t>
             </a:r>
             <a:r>
-              <a:rPr lang="en-US" altLang="ja-JP" sz="2400" dirty="0" smtClean="0">
+              <a:rPr lang="en-US" altLang="ja-JP" sz="2400" dirty="0">
                 <a:sym typeface="Symbol"/>
               </a:rPr>
               <a:t>5</a:t>
             </a:r>
             <a:r>
-              <a:rPr lang="en-US" altLang="ja-JP" sz="2400" dirty="0" smtClean="0"/>
+              <a:rPr lang="en-US" altLang="ja-JP" sz="2400" dirty="0"/>
               <a:t>} </a:t>
             </a:r>
             <a:endParaRPr lang="ja-JP" altLang="en-US" sz="2400" dirty="0"/>
@@ -4383,77 +4334,77 @@
           <a:lstStyle/>
           <a:p>
             <a:r>
-              <a:rPr lang="en-US" altLang="ja-JP" sz="2400" dirty="0" smtClean="0"/>
+              <a:rPr lang="en-US" altLang="ja-JP" sz="2400" dirty="0"/>
               <a:t> (a</a:t>
             </a:r>
             <a:r>
-              <a:rPr lang="en-US" altLang="ja-JP" sz="2400" dirty="0" smtClean="0">
+              <a:rPr lang="en-US" altLang="ja-JP" sz="2400" dirty="0">
                 <a:sym typeface="Symbol"/>
               </a:rPr>
               <a:t>5</a:t>
             </a:r>
             <a:r>
-              <a:rPr lang="en-US" altLang="ja-JP" sz="2400" dirty="0" smtClean="0"/>
+              <a:rPr lang="en-US" altLang="ja-JP" sz="2400" dirty="0"/>
               <a:t> </a:t>
             </a:r>
             <a:r>
-              <a:rPr lang="en-US" altLang="ja-JP" sz="2400" dirty="0" smtClean="0">
+              <a:rPr lang="en-US" altLang="ja-JP" sz="2400" dirty="0">
                 <a:sym typeface="Symbol"/>
               </a:rPr>
               <a:t> a&lt;5)</a:t>
             </a:r>
             <a:r>
-              <a:rPr lang="en-US" altLang="ja-JP" sz="2400" dirty="0" smtClean="0"/>
+              <a:rPr lang="en-US" altLang="ja-JP" sz="2400" dirty="0"/>
               <a:t> </a:t>
             </a:r>
             <a:r>
-              <a:rPr lang="en-US" altLang="ja-JP" sz="2400" dirty="0" smtClean="0">
+              <a:rPr lang="en-US" altLang="ja-JP" sz="2400" dirty="0">
                 <a:sym typeface="Symbol"/>
               </a:rPr>
               <a:t> a+15    </a:t>
             </a:r>
             <a:r>
-              <a:rPr lang="en-US" altLang="ja-JP" sz="2400" dirty="0" smtClean="0"/>
+              <a:rPr lang="en-US" altLang="ja-JP" sz="2400" dirty="0"/>
               <a:t>{a+1</a:t>
             </a:r>
             <a:r>
-              <a:rPr lang="en-US" altLang="ja-JP" sz="2400" dirty="0" smtClean="0">
+              <a:rPr lang="en-US" altLang="ja-JP" sz="2400" dirty="0">
                 <a:sym typeface="Symbol"/>
               </a:rPr>
               <a:t>5</a:t>
             </a:r>
             <a:r>
-              <a:rPr lang="en-US" altLang="ja-JP" sz="2400" dirty="0" smtClean="0"/>
+              <a:rPr lang="en-US" altLang="ja-JP" sz="2400" dirty="0"/>
               <a:t>}  a := a+1 {a</a:t>
             </a:r>
             <a:r>
-              <a:rPr lang="en-US" altLang="ja-JP" sz="2400" dirty="0" smtClean="0">
+              <a:rPr lang="en-US" altLang="ja-JP" sz="2400" dirty="0">
                 <a:sym typeface="Symbol"/>
               </a:rPr>
               <a:t>5</a:t>
             </a:r>
             <a:r>
-              <a:rPr lang="en-US" altLang="ja-JP" sz="2400" dirty="0" smtClean="0"/>
+              <a:rPr lang="en-US" altLang="ja-JP" sz="2400" dirty="0"/>
               <a:t>}   a</a:t>
             </a:r>
             <a:r>
-              <a:rPr lang="en-US" altLang="ja-JP" sz="2400" dirty="0" smtClean="0">
+              <a:rPr lang="en-US" altLang="ja-JP" sz="2400" dirty="0">
                 <a:sym typeface="Symbol"/>
               </a:rPr>
               <a:t>5</a:t>
             </a:r>
             <a:r>
-              <a:rPr lang="en-US" altLang="ja-JP" sz="2400" dirty="0" smtClean="0"/>
+              <a:rPr lang="en-US" altLang="ja-JP" sz="2400" dirty="0"/>
               <a:t> </a:t>
             </a:r>
             <a:r>
-              <a:rPr lang="en-US" altLang="ja-JP" sz="2400" dirty="0" smtClean="0">
+              <a:rPr lang="en-US" altLang="ja-JP" sz="2400" dirty="0">
                 <a:sym typeface="Symbol"/>
               </a:rPr>
               <a:t> a5</a:t>
             </a:r>
             <a:r>
-              <a:rPr lang="en-US" altLang="ja-JP" sz="2400" dirty="0" smtClean="0"/>
+              <a:rPr lang="en-US" altLang="ja-JP" sz="2400" dirty="0"/>
               <a:t> </a:t>
             </a:r>
             <a:endParaRPr lang="ja-JP" altLang="en-US" sz="2400" dirty="0"/>
@@ -4483,7 +4434,7 @@
           <a:lstStyle/>
           <a:p>
             <a:r>
-              <a:rPr kumimoji="1" lang="en-US" altLang="ja-JP" sz="2000" dirty="0" smtClean="0"/>
+              <a:rPr kumimoji="1" lang="en-US" altLang="ja-JP" sz="2000" dirty="0"/>
               <a:t>(consequence)</a:t>
             </a:r>
             <a:endParaRPr kumimoji="1" lang="ja-JP" altLang="en-US" sz="2000" dirty="0"/>
@@ -4513,7 +4464,7 @@
           <a:lstStyle/>
           <a:p>
             <a:r>
-              <a:rPr kumimoji="1" lang="en-US" altLang="ja-JP" sz="2000" dirty="0" smtClean="0"/>
+              <a:rPr kumimoji="1" lang="en-US" altLang="ja-JP" sz="2000" dirty="0"/>
               <a:t>(assignment)</a:t>
             </a:r>
             <a:endParaRPr kumimoji="1" lang="ja-JP" altLang="en-US" sz="2000" dirty="0"/>
@@ -4600,13 +4551,6 @@
   <p:clrMapOvr>
     <a:masterClrMapping/>
   </p:clrMapOvr>
-  <p:timing>
-    <p:tnLst>
-      <p:par>
-        <p:cTn xmlns:p14="http://schemas.microsoft.com/office/powerpoint/2010/main" id="1" dur="indefinite" restart="never" nodeType="tmRoot"/>
-      </p:par>
-    </p:tnLst>
-  </p:timing>
 </p:sld>
 </file>
 
@@ -4648,10 +4592,9 @@
           <a:lstStyle/>
           <a:p>
             <a:r>
-              <a:rPr kumimoji="1" lang="ja-JP" altLang="en-US" dirty="0" smtClean="0"/>
+              <a:rPr kumimoji="1" lang="ja-JP" altLang="en-US" dirty="0"/>
               <a:t>練習問題</a:t>
             </a:r>
-            <a:endParaRPr kumimoji="1" lang="ja-JP" altLang="en-US" dirty="0"/>
           </a:p>
         </p:txBody>
       </p:sp>
@@ -4678,18 +4621,18 @@
           <a:lstStyle/>
           <a:p>
             <a:r>
-              <a:rPr lang="ja-JP" altLang="en-US" sz="2800" dirty="0" smtClean="0"/>
+              <a:rPr lang="ja-JP" altLang="en-US" sz="2800" dirty="0"/>
               <a:t>（１） 以下の</a:t>
             </a:r>
             <a:r>
-              <a:rPr lang="en-US" altLang="ja-JP" sz="2800" dirty="0" smtClean="0"/>
+              <a:rPr lang="en-US" altLang="ja-JP" sz="2800" dirty="0"/>
               <a:t>C</a:t>
             </a:r>
             <a:r>
-              <a:rPr lang="ja-JP" altLang="en-US" sz="2800" dirty="0" smtClean="0"/>
+              <a:rPr lang="ja-JP" altLang="en-US" sz="2800" dirty="0"/>
               <a:t>言語のプログラム断片の制御フローを図示せよ。</a:t>
             </a:r>
-            <a:endParaRPr kumimoji="1" lang="en-US" altLang="ja-JP" sz="2800" dirty="0" smtClean="0"/>
+            <a:endParaRPr kumimoji="1" lang="en-US" altLang="ja-JP" sz="2800" dirty="0"/>
           </a:p>
         </p:txBody>
       </p:sp>
@@ -4716,19 +4659,19 @@
           <a:lstStyle/>
           <a:p>
             <a:r>
-              <a:rPr kumimoji="1" lang="en-US" altLang="ja-JP" sz="2800" dirty="0" smtClean="0"/>
+              <a:rPr kumimoji="1" lang="en-US" altLang="ja-JP" sz="2800" dirty="0"/>
               <a:t> if (y==1 || y==2) </a:t>
             </a:r>
           </a:p>
           <a:p>
             <a:r>
-              <a:rPr lang="en-US" altLang="ja-JP" sz="2800" dirty="0" smtClean="0"/>
+              <a:rPr lang="en-US" altLang="ja-JP" sz="2800" dirty="0"/>
               <a:t>     if (x &gt; 0)</a:t>
             </a:r>
           </a:p>
           <a:p>
             <a:r>
-              <a:rPr kumimoji="1" lang="en-US" altLang="ja-JP" sz="2800" dirty="0" smtClean="0"/>
+              <a:rPr kumimoji="1" lang="en-US" altLang="ja-JP" sz="2800" dirty="0"/>
               <a:t>         x = x - 1;</a:t>
             </a:r>
           </a:p>
@@ -4757,18 +4700,18 @@
           <a:lstStyle/>
           <a:p>
             <a:r>
-              <a:rPr lang="ja-JP" altLang="en-US" sz="2800" dirty="0" smtClean="0"/>
+              <a:rPr lang="ja-JP" altLang="en-US" sz="2800" dirty="0"/>
               <a:t>（２） 以下の</a:t>
             </a:r>
             <a:r>
-              <a:rPr lang="en-US" altLang="ja-JP" sz="2800" dirty="0" smtClean="0"/>
+              <a:rPr lang="en-US" altLang="ja-JP" sz="2800" dirty="0"/>
               <a:t>C</a:t>
             </a:r>
             <a:r>
-              <a:rPr lang="ja-JP" altLang="en-US" sz="2800" dirty="0" smtClean="0"/>
+              <a:rPr lang="ja-JP" altLang="en-US" sz="2800" dirty="0"/>
               <a:t>言語のプログラム断片の制御フローを図示せよ。</a:t>
             </a:r>
-            <a:endParaRPr kumimoji="1" lang="en-US" altLang="ja-JP" sz="2800" dirty="0" smtClean="0"/>
+            <a:endParaRPr kumimoji="1" lang="en-US" altLang="ja-JP" sz="2800" dirty="0"/>
           </a:p>
         </p:txBody>
       </p:sp>
@@ -4795,71 +4738,63 @@
           <a:lstStyle/>
           <a:p>
             <a:r>
-              <a:rPr kumimoji="1" lang="en-US" altLang="ja-JP" sz="2800" dirty="0" smtClean="0"/>
+              <a:rPr kumimoji="1" lang="en-US" altLang="ja-JP" sz="2800" dirty="0"/>
               <a:t> while (x &gt; 0) {</a:t>
             </a:r>
           </a:p>
           <a:p>
             <a:r>
-              <a:rPr lang="en-US" altLang="ja-JP" sz="2800" dirty="0" smtClean="0"/>
+              <a:rPr lang="en-US" altLang="ja-JP" sz="2800" dirty="0"/>
               <a:t>    </a:t>
             </a:r>
             <a:r>
-              <a:rPr kumimoji="1" lang="en-US" altLang="ja-JP" sz="2800" dirty="0" smtClean="0"/>
+              <a:rPr kumimoji="1" lang="en-US" altLang="ja-JP" sz="2800" dirty="0"/>
               <a:t> if (x</a:t>
             </a:r>
             <a:r>
               <a:rPr lang="en-US" altLang="ja-JP" sz="2800" dirty="0"/>
-              <a:t>%</a:t>
-            </a:r>
-            <a:r>
-              <a:rPr lang="en-US" altLang="ja-JP" sz="2800" dirty="0" smtClean="0"/>
-              <a:t>2==0</a:t>
-            </a:r>
-            <a:r>
-              <a:rPr kumimoji="1" lang="en-US" altLang="ja-JP" sz="2800" dirty="0" smtClean="0"/>
+              <a:t>%2==0</a:t>
+            </a:r>
+            <a:r>
+              <a:rPr kumimoji="1" lang="en-US" altLang="ja-JP" sz="2800" dirty="0"/>
               <a:t> || x%3==</a:t>
             </a:r>
             <a:r>
-              <a:rPr lang="en-US" altLang="ja-JP" sz="2800" dirty="0" smtClean="0"/>
+              <a:rPr lang="en-US" altLang="ja-JP" sz="2800" dirty="0"/>
               <a:t>0</a:t>
             </a:r>
             <a:r>
-              <a:rPr kumimoji="1" lang="en-US" altLang="ja-JP" sz="2800" dirty="0" smtClean="0"/>
+              <a:rPr kumimoji="1" lang="en-US" altLang="ja-JP" sz="2800" dirty="0"/>
               <a:t>)</a:t>
             </a:r>
           </a:p>
           <a:p>
             <a:r>
-              <a:rPr lang="en-US" altLang="ja-JP" sz="2800" dirty="0" smtClean="0"/>
+              <a:rPr lang="en-US" altLang="ja-JP" sz="2800" dirty="0"/>
               <a:t>     </a:t>
             </a:r>
             <a:r>
-              <a:rPr kumimoji="1" lang="en-US" altLang="ja-JP" sz="2800" dirty="0" smtClean="0"/>
+              <a:rPr kumimoji="1" lang="en-US" altLang="ja-JP" sz="2800" dirty="0"/>
               <a:t>    s = s </a:t>
             </a:r>
             <a:r>
-              <a:rPr lang="en-US" altLang="ja-JP" sz="2800" dirty="0" smtClean="0"/>
+              <a:rPr lang="en-US" altLang="ja-JP" sz="2800" dirty="0"/>
               <a:t>+ x</a:t>
             </a:r>
             <a:r>
-              <a:rPr kumimoji="1" lang="en-US" altLang="ja-JP" sz="2800" dirty="0" smtClean="0"/>
+              <a:rPr kumimoji="1" lang="en-US" altLang="ja-JP" sz="2800" dirty="0"/>
               <a:t>;</a:t>
             </a:r>
           </a:p>
           <a:p>
             <a:r>
               <a:rPr lang="en-US" altLang="ja-JP" sz="2800" dirty="0"/>
-              <a:t> </a:t>
-            </a:r>
-            <a:r>
-              <a:rPr lang="en-US" altLang="ja-JP" sz="2800" dirty="0" smtClean="0"/>
-              <a:t>    x = x – 1;</a:t>
-            </a:r>
-          </a:p>
-          <a:p>
-            <a:r>
-              <a:rPr lang="en-US" altLang="ja-JP" sz="2800" dirty="0" smtClean="0"/>
+              <a:t>     x = x – 1;</a:t>
+            </a:r>
+          </a:p>
+          <a:p>
+            <a:r>
+              <a:rPr lang="en-US" altLang="ja-JP" sz="2800" dirty="0"/>
               <a:t> }</a:t>
             </a:r>
           </a:p>
@@ -4875,13 +4810,6 @@
   <p:clrMapOvr>
     <a:masterClrMapping/>
   </p:clrMapOvr>
-  <p:timing>
-    <p:tnLst>
-      <p:par>
-        <p:cTn xmlns:p14="http://schemas.microsoft.com/office/powerpoint/2010/main" id="1" dur="indefinite" restart="never" nodeType="tmRoot"/>
-      </p:par>
-    </p:tnLst>
-  </p:timing>
 </p:sld>
 </file>
 
@@ -4918,14 +4846,13 @@
           <a:lstStyle/>
           <a:p>
             <a:r>
-              <a:rPr kumimoji="1" lang="en-US" altLang="ja-JP" dirty="0" smtClean="0"/>
+              <a:rPr kumimoji="1" lang="en-US" altLang="ja-JP" dirty="0"/>
               <a:t>(1) </a:t>
             </a:r>
             <a:r>
-              <a:rPr kumimoji="1" lang="ja-JP" altLang="en-US" dirty="0" smtClean="0"/>
+              <a:rPr kumimoji="1" lang="ja-JP" altLang="en-US" dirty="0"/>
               <a:t>解答例</a:t>
             </a:r>
-            <a:endParaRPr kumimoji="1" lang="ja-JP" altLang="en-US" dirty="0"/>
           </a:p>
         </p:txBody>
       </p:sp>
@@ -4992,7 +4919,7 @@
           <a:lstStyle/>
           <a:p>
             <a:r>
-              <a:rPr lang="en-US" altLang="ja-JP" sz="2800" dirty="0" smtClean="0"/>
+              <a:rPr lang="en-US" altLang="ja-JP" sz="2800" dirty="0"/>
               <a:t>Entry</a:t>
             </a:r>
           </a:p>
@@ -5046,15 +4973,7 @@
                   <a:schemeClr val="tx1"/>
                 </a:solidFill>
               </a:rPr>
-              <a:t>y</a:t>
-            </a:r>
-            <a:r>
-              <a:rPr lang="en-US" altLang="ja-JP" sz="2800" dirty="0" smtClean="0">
-                <a:solidFill>
-                  <a:schemeClr val="tx1"/>
-                </a:solidFill>
-              </a:rPr>
-              <a:t>==1</a:t>
+              <a:t>y==1</a:t>
             </a:r>
             <a:endParaRPr kumimoji="1" lang="ja-JP" altLang="en-US" sz="2800" dirty="0">
               <a:solidFill>
@@ -5166,7 +5085,7 @@
           <a:lstStyle/>
           <a:p>
             <a:r>
-              <a:rPr lang="en-US" altLang="ja-JP" sz="2800" dirty="0" smtClean="0"/>
+              <a:rPr lang="en-US" altLang="ja-JP" sz="2800" dirty="0"/>
               <a:t>Exit</a:t>
             </a:r>
           </a:p>
@@ -5195,7 +5114,7 @@
           <a:lstStyle/>
           <a:p>
             <a:r>
-              <a:rPr kumimoji="1" lang="en-US" altLang="ja-JP" sz="2800" dirty="0" smtClean="0"/>
+              <a:rPr kumimoji="1" lang="en-US" altLang="ja-JP" sz="2800" dirty="0"/>
               <a:t>F</a:t>
             </a:r>
             <a:endParaRPr kumimoji="1" lang="ja-JP" altLang="en-US" sz="2800" dirty="0"/>
@@ -5225,7 +5144,7 @@
           <a:lstStyle/>
           <a:p>
             <a:r>
-              <a:rPr kumimoji="1" lang="en-US" altLang="ja-JP" sz="2800" dirty="0" smtClean="0"/>
+              <a:rPr kumimoji="1" lang="en-US" altLang="ja-JP" sz="2800" dirty="0"/>
               <a:t>T</a:t>
             </a:r>
             <a:endParaRPr kumimoji="1" lang="ja-JP" altLang="en-US" sz="2800" dirty="0"/>
@@ -5255,7 +5174,7 @@
           <a:lstStyle/>
           <a:p>
             <a:r>
-              <a:rPr lang="en-US" altLang="ja-JP" sz="2800" dirty="0" smtClean="0"/>
+              <a:rPr lang="en-US" altLang="ja-JP" sz="2800" dirty="0"/>
               <a:t>  x = x-1</a:t>
             </a:r>
           </a:p>
@@ -5304,7 +5223,7 @@
           <a:p>
             <a:pPr algn="ctr"/>
             <a:r>
-              <a:rPr lang="en-US" altLang="ja-JP" sz="2800" dirty="0" smtClean="0">
+              <a:rPr lang="en-US" altLang="ja-JP" sz="2800" dirty="0">
                 <a:solidFill>
                   <a:schemeClr val="tx1"/>
                 </a:solidFill>
@@ -5312,7 +5231,7 @@
               <a:t>y</a:t>
             </a:r>
             <a:r>
-              <a:rPr kumimoji="1" lang="en-US" altLang="ja-JP" sz="2800" dirty="0" smtClean="0">
+              <a:rPr kumimoji="1" lang="en-US" altLang="ja-JP" sz="2800" dirty="0">
                 <a:solidFill>
                   <a:schemeClr val="tx1"/>
                 </a:solidFill>
@@ -5388,7 +5307,7 @@
           <a:lstStyle/>
           <a:p>
             <a:r>
-              <a:rPr kumimoji="1" lang="en-US" altLang="ja-JP" sz="2800" dirty="0" smtClean="0"/>
+              <a:rPr kumimoji="1" lang="en-US" altLang="ja-JP" sz="2800" dirty="0"/>
               <a:t>T</a:t>
             </a:r>
             <a:endParaRPr kumimoji="1" lang="ja-JP" altLang="en-US" sz="2800" dirty="0"/>
@@ -5562,7 +5481,7 @@
           <a:lstStyle/>
           <a:p>
             <a:r>
-              <a:rPr kumimoji="1" lang="en-US" altLang="ja-JP" sz="2800" dirty="0" smtClean="0"/>
+              <a:rPr kumimoji="1" lang="en-US" altLang="ja-JP" sz="2800" dirty="0"/>
               <a:t>F</a:t>
             </a:r>
             <a:endParaRPr kumimoji="1" lang="ja-JP" altLang="en-US" sz="2800" dirty="0"/>
@@ -5648,7 +5567,7 @@
           <a:p>
             <a:pPr algn="ctr"/>
             <a:r>
-              <a:rPr lang="en-US" altLang="ja-JP" sz="2800" dirty="0" smtClean="0">
+              <a:rPr lang="en-US" altLang="ja-JP" sz="2800" dirty="0">
                 <a:solidFill>
                   <a:schemeClr val="tx1"/>
                 </a:solidFill>
@@ -5722,7 +5641,7 @@
           <a:lstStyle/>
           <a:p>
             <a:r>
-              <a:rPr kumimoji="1" lang="en-US" altLang="ja-JP" sz="2800" dirty="0" smtClean="0"/>
+              <a:rPr kumimoji="1" lang="en-US" altLang="ja-JP" sz="2800" dirty="0"/>
               <a:t>T</a:t>
             </a:r>
             <a:endParaRPr kumimoji="1" lang="ja-JP" altLang="en-US" sz="2800" dirty="0"/>
@@ -5823,7 +5742,7 @@
           <a:lstStyle/>
           <a:p>
             <a:r>
-              <a:rPr kumimoji="1" lang="en-US" altLang="ja-JP" sz="2800" dirty="0" smtClean="0"/>
+              <a:rPr kumimoji="1" lang="en-US" altLang="ja-JP" sz="2800" dirty="0"/>
               <a:t>F</a:t>
             </a:r>
             <a:endParaRPr kumimoji="1" lang="ja-JP" altLang="en-US" sz="2800" dirty="0"/>
@@ -5947,14 +5866,13 @@
           <a:lstStyle/>
           <a:p>
             <a:r>
-              <a:rPr kumimoji="1" lang="en-US" altLang="ja-JP" dirty="0" smtClean="0"/>
+              <a:rPr kumimoji="1" lang="en-US" altLang="ja-JP" dirty="0"/>
               <a:t>(2) </a:t>
             </a:r>
             <a:r>
-              <a:rPr kumimoji="1" lang="ja-JP" altLang="en-US" dirty="0" smtClean="0"/>
+              <a:rPr kumimoji="1" lang="ja-JP" altLang="en-US" dirty="0"/>
               <a:t>解答例</a:t>
             </a:r>
-            <a:endParaRPr kumimoji="1" lang="ja-JP" altLang="en-US" dirty="0"/>
           </a:p>
         </p:txBody>
       </p:sp>
@@ -6021,7 +5939,7 @@
           <a:lstStyle/>
           <a:p>
             <a:r>
-              <a:rPr lang="en-US" altLang="ja-JP" sz="2800" dirty="0" smtClean="0"/>
+              <a:rPr lang="en-US" altLang="ja-JP" sz="2800" dirty="0"/>
               <a:t>Entry</a:t>
             </a:r>
           </a:p>
@@ -6075,15 +5993,7 @@
                   <a:schemeClr val="tx1"/>
                 </a:solidFill>
               </a:rPr>
-              <a:t>x</a:t>
-            </a:r>
-            <a:r>
-              <a:rPr lang="en-US" altLang="ja-JP" dirty="0" smtClean="0">
-                <a:solidFill>
-                  <a:schemeClr val="tx1"/>
-                </a:solidFill>
-              </a:rPr>
-              <a:t>%2==0</a:t>
+              <a:t>x%2==0</a:t>
             </a:r>
             <a:endParaRPr kumimoji="1" lang="ja-JP" altLang="en-US" dirty="0">
               <a:solidFill>
@@ -6195,7 +6105,7 @@
           <a:lstStyle/>
           <a:p>
             <a:r>
-              <a:rPr lang="en-US" altLang="ja-JP" sz="2800" dirty="0" smtClean="0"/>
+              <a:rPr lang="en-US" altLang="ja-JP" sz="2800" dirty="0"/>
               <a:t>Exit</a:t>
             </a:r>
           </a:p>
@@ -6224,7 +6134,7 @@
           <a:lstStyle/>
           <a:p>
             <a:r>
-              <a:rPr kumimoji="1" lang="en-US" altLang="ja-JP" sz="2800" dirty="0" smtClean="0"/>
+              <a:rPr kumimoji="1" lang="en-US" altLang="ja-JP" sz="2800" dirty="0"/>
               <a:t>F</a:t>
             </a:r>
             <a:endParaRPr kumimoji="1" lang="ja-JP" altLang="en-US" sz="2800" dirty="0"/>
@@ -6254,7 +6164,7 @@
           <a:lstStyle/>
           <a:p>
             <a:r>
-              <a:rPr kumimoji="1" lang="en-US" altLang="ja-JP" sz="2800" dirty="0" smtClean="0"/>
+              <a:rPr kumimoji="1" lang="en-US" altLang="ja-JP" sz="2800" dirty="0"/>
               <a:t>T</a:t>
             </a:r>
             <a:endParaRPr kumimoji="1" lang="ja-JP" altLang="en-US" sz="2800" dirty="0"/>
@@ -6284,14 +6194,14 @@
           <a:lstStyle/>
           <a:p>
             <a:r>
-              <a:rPr lang="en-US" altLang="ja-JP" sz="2800" dirty="0" smtClean="0"/>
+              <a:rPr lang="en-US" altLang="ja-JP" sz="2800" dirty="0"/>
               <a:t>  s = </a:t>
             </a:r>
             <a:r>
-              <a:rPr lang="en-US" altLang="ja-JP" sz="2800" dirty="0" err="1" smtClean="0"/>
+              <a:rPr lang="en-US" altLang="ja-JP" sz="2800" dirty="0" err="1"/>
               <a:t>s+x</a:t>
             </a:r>
-            <a:endParaRPr lang="en-US" altLang="ja-JP" sz="2800" dirty="0" smtClean="0"/>
+            <a:endParaRPr lang="en-US" altLang="ja-JP" sz="2800" dirty="0"/>
           </a:p>
         </p:txBody>
       </p:sp>
@@ -6338,7 +6248,7 @@
           <a:p>
             <a:pPr algn="ctr"/>
             <a:r>
-              <a:rPr lang="en-US" altLang="ja-JP" sz="1600" dirty="0" smtClean="0">
+              <a:rPr lang="en-US" altLang="ja-JP" sz="1600" dirty="0">
                 <a:solidFill>
                   <a:schemeClr val="tx1"/>
                 </a:solidFill>
@@ -6414,7 +6324,7 @@
           <a:lstStyle/>
           <a:p>
             <a:r>
-              <a:rPr kumimoji="1" lang="en-US" altLang="ja-JP" sz="2800" dirty="0" smtClean="0"/>
+              <a:rPr kumimoji="1" lang="en-US" altLang="ja-JP" sz="2800" dirty="0"/>
               <a:t>T</a:t>
             </a:r>
             <a:endParaRPr kumimoji="1" lang="ja-JP" altLang="en-US" sz="2800" dirty="0"/>
@@ -6552,7 +6462,7 @@
           <a:lstStyle/>
           <a:p>
             <a:r>
-              <a:rPr kumimoji="1" lang="en-US" altLang="ja-JP" sz="2800" dirty="0" smtClean="0"/>
+              <a:rPr kumimoji="1" lang="en-US" altLang="ja-JP" sz="2800" dirty="0"/>
               <a:t>F</a:t>
             </a:r>
             <a:endParaRPr kumimoji="1" lang="ja-JP" altLang="en-US" sz="2800" dirty="0"/>
@@ -6602,7 +6512,7 @@
           <a:p>
             <a:pPr algn="ctr"/>
             <a:r>
-              <a:rPr lang="en-US" altLang="ja-JP" sz="2800" dirty="0" smtClean="0">
+              <a:rPr lang="en-US" altLang="ja-JP" sz="2800" dirty="0">
                 <a:solidFill>
                   <a:schemeClr val="tx1"/>
                 </a:solidFill>
@@ -6676,7 +6586,7 @@
           <a:lstStyle/>
           <a:p>
             <a:r>
-              <a:rPr kumimoji="1" lang="en-US" altLang="ja-JP" sz="2800" dirty="0" smtClean="0"/>
+              <a:rPr kumimoji="1" lang="en-US" altLang="ja-JP" sz="2800" dirty="0"/>
               <a:t>T</a:t>
             </a:r>
             <a:endParaRPr kumimoji="1" lang="ja-JP" altLang="en-US" sz="2800" dirty="0"/>
@@ -6777,7 +6687,7 @@
           <a:lstStyle/>
           <a:p>
             <a:r>
-              <a:rPr kumimoji="1" lang="en-US" altLang="ja-JP" sz="2800" dirty="0" smtClean="0"/>
+              <a:rPr kumimoji="1" lang="en-US" altLang="ja-JP" sz="2800" dirty="0"/>
               <a:t>F</a:t>
             </a:r>
             <a:endParaRPr kumimoji="1" lang="ja-JP" altLang="en-US" sz="2800" dirty="0"/>
@@ -6953,7 +6863,7 @@
           <a:lstStyle/>
           <a:p>
             <a:r>
-              <a:rPr lang="en-US" altLang="ja-JP" sz="2800" dirty="0" smtClean="0"/>
+              <a:rPr lang="en-US" altLang="ja-JP" sz="2800" dirty="0"/>
               <a:t>  x=x-1</a:t>
             </a:r>
           </a:p>
@@ -7076,14 +6986,13 @@
           <a:lstStyle/>
           <a:p>
             <a:r>
-              <a:rPr kumimoji="1" lang="en-US" altLang="ja-JP" dirty="0" smtClean="0"/>
+              <a:rPr kumimoji="1" lang="en-US" altLang="ja-JP" dirty="0"/>
               <a:t>Hoare</a:t>
             </a:r>
             <a:r>
-              <a:rPr kumimoji="1" lang="ja-JP" altLang="en-US" dirty="0" smtClean="0"/>
+              <a:rPr kumimoji="1" lang="ja-JP" altLang="en-US" dirty="0"/>
               <a:t>論理の練習問題</a:t>
             </a:r>
-            <a:endParaRPr kumimoji="1" lang="ja-JP" altLang="en-US" dirty="0"/>
           </a:p>
         </p:txBody>
       </p:sp>
@@ -7109,18 +7018,18 @@
           <a:lstStyle/>
           <a:p>
             <a:r>
-              <a:rPr lang="ja-JP" altLang="en-US" sz="2800" dirty="0" smtClean="0"/>
+              <a:rPr lang="ja-JP" altLang="en-US" sz="2800" dirty="0"/>
               <a:t>以下の</a:t>
             </a:r>
             <a:r>
-              <a:rPr lang="en-US" altLang="ja-JP" sz="2800" dirty="0" smtClean="0"/>
+              <a:rPr lang="en-US" altLang="ja-JP" sz="2800" dirty="0"/>
               <a:t>Hoare Triple</a:t>
             </a:r>
             <a:r>
-              <a:rPr lang="ja-JP" altLang="en-US" sz="2800" dirty="0" smtClean="0"/>
+              <a:rPr lang="ja-JP" altLang="en-US" sz="2800" dirty="0"/>
               <a:t>を推論規則を使って導け。</a:t>
             </a:r>
-            <a:endParaRPr lang="en-US" altLang="ja-JP" sz="2800" dirty="0" smtClean="0"/>
+            <a:endParaRPr lang="en-US" altLang="ja-JP" sz="2800" dirty="0"/>
           </a:p>
           <a:p>
             <a:pPr marL="514350" indent="-514350">
@@ -7128,7 +7037,7 @@
               <a:buAutoNum type="arabicParenBoth"/>
             </a:pPr>
             <a:r>
-              <a:rPr lang="en-US" altLang="ja-JP" sz="2800" dirty="0" smtClean="0"/>
+              <a:rPr lang="en-US" altLang="ja-JP" sz="2800" dirty="0"/>
               <a:t>{ a = 0 }  a := a + 2  { a = 2 }</a:t>
             </a:r>
           </a:p>
@@ -7138,89 +7047,77 @@
               <a:buAutoNum type="arabicParenBoth"/>
             </a:pPr>
             <a:r>
-              <a:rPr lang="en-US" altLang="ja-JP" sz="2800" dirty="0" smtClean="0"/>
+              <a:rPr lang="en-US" altLang="ja-JP" sz="2800" dirty="0"/>
               <a:t>{ a = 3 } </a:t>
             </a:r>
             <a:r>
-              <a:rPr lang="en-US" altLang="ja-JP" sz="2800" b="1" dirty="0" smtClean="0"/>
+              <a:rPr lang="en-US" altLang="ja-JP" sz="2800" b="1" dirty="0"/>
               <a:t>if</a:t>
             </a:r>
             <a:r>
-              <a:rPr lang="en-US" altLang="ja-JP" sz="2800" dirty="0" smtClean="0"/>
+              <a:rPr lang="en-US" altLang="ja-JP" sz="2800" dirty="0"/>
               <a:t>  a = 3  </a:t>
             </a:r>
             <a:r>
-              <a:rPr lang="en-US" altLang="ja-JP" sz="2800" b="1" dirty="0" smtClean="0"/>
+              <a:rPr lang="en-US" altLang="ja-JP" sz="2800" b="1" dirty="0"/>
               <a:t>then</a:t>
             </a:r>
             <a:r>
-              <a:rPr lang="en-US" altLang="ja-JP" sz="2800" dirty="0" smtClean="0"/>
+              <a:rPr lang="en-US" altLang="ja-JP" sz="2800" dirty="0"/>
               <a:t>  a := a + 1</a:t>
             </a:r>
             <a:r>
-              <a:rPr lang="en-US" altLang="ja-JP" sz="2800" baseline="-25000" dirty="0" smtClean="0"/>
+              <a:rPr lang="en-US" altLang="ja-JP" sz="2800" baseline="-25000" dirty="0"/>
               <a:t>  </a:t>
             </a:r>
             <a:r>
-              <a:rPr lang="en-US" altLang="ja-JP" sz="2800" b="1" dirty="0" smtClean="0"/>
+              <a:rPr lang="en-US" altLang="ja-JP" sz="2800" b="1" dirty="0"/>
               <a:t>else</a:t>
             </a:r>
             <a:r>
-              <a:rPr lang="en-US" altLang="ja-JP" sz="2800" b="1" baseline="-25000" dirty="0" smtClean="0"/>
+              <a:rPr lang="en-US" altLang="ja-JP" sz="2800" b="1" baseline="-25000" dirty="0"/>
               <a:t> </a:t>
             </a:r>
             <a:r>
-              <a:rPr lang="en-US" altLang="ja-JP" sz="2800" baseline="-25000" dirty="0" smtClean="0"/>
+              <a:rPr lang="en-US" altLang="ja-JP" sz="2800" baseline="-25000" dirty="0"/>
               <a:t> </a:t>
             </a:r>
             <a:r>
-              <a:rPr lang="en-US" altLang="ja-JP" sz="2800" dirty="0" smtClean="0"/>
+              <a:rPr lang="en-US" altLang="ja-JP" sz="2800" dirty="0"/>
               <a:t>a := a – 1 { a = 4 }</a:t>
             </a:r>
-            <a:endParaRPr lang="ja-JP" altLang="en-US" sz="2800" dirty="0" smtClean="0"/>
+            <a:endParaRPr lang="ja-JP" altLang="en-US" sz="2800" dirty="0"/>
           </a:p>
           <a:p>
             <a:pPr marL="514350" indent="-514350">
               <a:buAutoNum type="arabicParenBoth"/>
             </a:pPr>
             <a:r>
-              <a:rPr lang="en-US" altLang="ja-JP" sz="2800" dirty="0" smtClean="0"/>
+              <a:rPr lang="en-US" altLang="ja-JP" sz="2800" dirty="0"/>
               <a:t>{ a = 1 } </a:t>
             </a:r>
             <a:r>
-              <a:rPr lang="en-US" altLang="ja-JP" sz="2800" b="1" dirty="0" smtClean="0"/>
+              <a:rPr lang="en-US" altLang="ja-JP" sz="2800" b="1" dirty="0"/>
               <a:t>while</a:t>
             </a:r>
             <a:r>
-              <a:rPr lang="en-US" altLang="ja-JP" sz="2800" dirty="0" smtClean="0"/>
+              <a:rPr lang="en-US" altLang="ja-JP" sz="2800" dirty="0"/>
+              <a:t> a &lt; 5 </a:t>
+            </a:r>
+            <a:r>
+              <a:rPr lang="en-US" altLang="ja-JP" sz="2800" b="1" dirty="0"/>
+              <a:t>do</a:t>
+            </a:r>
+            <a:r>
+              <a:rPr lang="en-US" altLang="ja-JP" sz="2800" dirty="0"/>
+              <a:t> a := a + 1 </a:t>
+            </a:r>
+            <a:r>
+              <a:rPr lang="ja-JP" altLang="en-US" sz="2800" dirty="0"/>
               <a:t> </a:t>
             </a:r>
             <a:r>
-              <a:rPr lang="en-US" altLang="ja-JP" sz="2800" dirty="0" smtClean="0"/>
-              <a:t>a </a:t>
-            </a:r>
-            <a:r>
-              <a:rPr lang="en-US" altLang="ja-JP" sz="2800" dirty="0" smtClean="0"/>
-              <a:t>&lt; </a:t>
-            </a:r>
-            <a:r>
-              <a:rPr lang="en-US" altLang="ja-JP" sz="2800" dirty="0" smtClean="0"/>
-              <a:t>5 </a:t>
-            </a:r>
-            <a:r>
-              <a:rPr lang="en-US" altLang="ja-JP" sz="2800" b="1" dirty="0" smtClean="0"/>
-              <a:t>do</a:t>
-            </a:r>
-            <a:r>
-              <a:rPr lang="en-US" altLang="ja-JP" sz="2800" dirty="0" smtClean="0"/>
-              <a:t> a := a + 1 </a:t>
-            </a:r>
-            <a:r>
-              <a:rPr lang="ja-JP" altLang="en-US" sz="2800" dirty="0" smtClean="0"/>
-              <a:t> </a:t>
-            </a:r>
-            <a:r>
-              <a:rPr lang="en-US" altLang="ja-JP" sz="2800" dirty="0" smtClean="0"/>
+              <a:rPr lang="en-US" altLang="ja-JP" sz="2800" dirty="0"/>
               <a:t>{ a = 5 }</a:t>
             </a:r>
           </a:p>
@@ -7231,13 +7128,6 @@
   <p:clrMapOvr>
     <a:masterClrMapping/>
   </p:clrMapOvr>
-  <p:timing>
-    <p:tnLst>
-      <p:par>
-        <p:cTn xmlns:p14="http://schemas.microsoft.com/office/powerpoint/2010/main" id="1" dur="indefinite" restart="never" nodeType="tmRoot"/>
-      </p:par>
-    </p:tnLst>
-  </p:timing>
 </p:sld>
 </file>
 
@@ -7274,11 +7164,11 @@
           <a:lstStyle/>
           <a:p>
             <a:r>
-              <a:rPr lang="en-US" altLang="ja-JP" dirty="0" smtClean="0"/>
+              <a:rPr lang="en-US" altLang="ja-JP" dirty="0"/>
               <a:t>(1) </a:t>
             </a:r>
             <a:r>
-              <a:rPr lang="ja-JP" altLang="en-US" dirty="0" smtClean="0"/>
+              <a:rPr lang="ja-JP" altLang="en-US" dirty="0"/>
               <a:t>解答</a:t>
             </a:r>
             <a:endParaRPr kumimoji="1" lang="ja-JP" altLang="en-US" dirty="0"/>
@@ -7308,7 +7198,7 @@
           <a:p>
             <a:pPr marL="514350" indent="-514350"/>
             <a:r>
-              <a:rPr lang="en-US" altLang="ja-JP" sz="2800" dirty="0" smtClean="0"/>
+              <a:rPr lang="en-US" altLang="ja-JP" sz="2800" dirty="0"/>
               <a:t>{ a + 2 = 2 }  a := a + 2  { a = 2 }</a:t>
             </a:r>
           </a:p>
@@ -7372,7 +7262,7 @@
           <a:lstStyle/>
           <a:p>
             <a:r>
-              <a:rPr kumimoji="1" lang="en-US" altLang="ja-JP" sz="2000" dirty="0" smtClean="0"/>
+              <a:rPr kumimoji="1" lang="en-US" altLang="ja-JP" sz="2000" dirty="0"/>
               <a:t>(assign)</a:t>
             </a:r>
             <a:endParaRPr kumimoji="1" lang="ja-JP" altLang="en-US" sz="2000" dirty="0"/>
@@ -7437,15 +7327,15 @@
           <a:lstStyle/>
           <a:p>
             <a:r>
-              <a:rPr kumimoji="1" lang="en-US" altLang="ja-JP" sz="2000" dirty="0" smtClean="0"/>
+              <a:rPr kumimoji="1" lang="en-US" altLang="ja-JP" sz="2000" dirty="0"/>
               <a:t>(</a:t>
             </a:r>
             <a:r>
-              <a:rPr kumimoji="1" lang="en-US" altLang="ja-JP" sz="2000" dirty="0" err="1" smtClean="0"/>
+              <a:rPr kumimoji="1" lang="en-US" altLang="ja-JP" sz="2000" dirty="0" err="1"/>
               <a:t>conseq</a:t>
             </a:r>
             <a:r>
-              <a:rPr kumimoji="1" lang="en-US" altLang="ja-JP" sz="2000" dirty="0" smtClean="0"/>
+              <a:rPr kumimoji="1" lang="en-US" altLang="ja-JP" sz="2000" dirty="0"/>
               <a:t>)</a:t>
             </a:r>
             <a:endParaRPr kumimoji="1" lang="ja-JP" altLang="en-US" sz="2000" dirty="0"/>
@@ -7475,7 +7365,7 @@
           <a:p>
             <a:pPr marL="514350" indent="-514350"/>
             <a:r>
-              <a:rPr lang="en-US" altLang="ja-JP" sz="2800" dirty="0" smtClean="0"/>
+              <a:rPr lang="en-US" altLang="ja-JP" sz="2800" dirty="0"/>
               <a:t>{ a = 0 }  a := a + 2  { a = 2 }</a:t>
             </a:r>
           </a:p>
@@ -7503,18 +7393,9 @@
           <a:lstStyle/>
           <a:p>
             <a:r>
-              <a:rPr lang="en-US" altLang="ja-JP" sz="2800" dirty="0" smtClean="0"/>
-              <a:t>a=0 </a:t>
-            </a:r>
-            <a:r>
               <a:rPr lang="en-US" altLang="ja-JP" sz="2800" dirty="0"/>
-              <a:t> </a:t>
-            </a:r>
-            <a:r>
-              <a:rPr lang="en-US" altLang="ja-JP" sz="2800" dirty="0" smtClean="0"/>
-              <a:t>a+2=2</a:t>
-            </a:r>
-            <a:endParaRPr lang="en-US" altLang="ja-JP" sz="2800" dirty="0"/>
+              <a:t>a=0  a+2=2</a:t>
+            </a:r>
           </a:p>
         </p:txBody>
       </p:sp>
@@ -7541,50 +7422,49 @@
           <a:lstStyle/>
           <a:p>
             <a:r>
-              <a:rPr kumimoji="1" lang="ja-JP" altLang="en-US" sz="2400" dirty="0" smtClean="0"/>
+              <a:rPr kumimoji="1" lang="ja-JP" altLang="en-US" sz="2400" dirty="0"/>
               <a:t>スペースが足りないので、</a:t>
             </a:r>
             <a:r>
-              <a:rPr kumimoji="1" lang="en-US" altLang="ja-JP" sz="2400" dirty="0" smtClean="0"/>
+              <a:rPr kumimoji="1" lang="en-US" altLang="ja-JP" sz="2400" dirty="0"/>
               <a:t>(assignment axiom)</a:t>
             </a:r>
             <a:r>
-              <a:rPr kumimoji="1" lang="ja-JP" altLang="en-US" sz="2400" dirty="0" smtClean="0"/>
+              <a:rPr kumimoji="1" lang="ja-JP" altLang="en-US" sz="2400" dirty="0"/>
               <a:t>を</a:t>
             </a:r>
             <a:r>
-              <a:rPr kumimoji="1" lang="en-US" altLang="ja-JP" sz="2400" dirty="0" smtClean="0"/>
+              <a:rPr kumimoji="1" lang="en-US" altLang="ja-JP" sz="2400" dirty="0"/>
               <a:t>(assign)</a:t>
             </a:r>
             <a:r>
-              <a:rPr kumimoji="1" lang="ja-JP" altLang="en-US" sz="2400" dirty="0" smtClean="0"/>
+              <a:rPr kumimoji="1" lang="ja-JP" altLang="en-US" sz="2400" dirty="0"/>
               <a:t>、</a:t>
             </a:r>
             <a:r>
-              <a:rPr kumimoji="1" lang="en-US" altLang="ja-JP" sz="2400" dirty="0" smtClean="0"/>
+              <a:rPr kumimoji="1" lang="en-US" altLang="ja-JP" sz="2400" dirty="0"/>
               <a:t>(consequence rule)</a:t>
             </a:r>
             <a:r>
-              <a:rPr kumimoji="1" lang="ja-JP" altLang="en-US" sz="2400" dirty="0" smtClean="0"/>
+              <a:rPr kumimoji="1" lang="ja-JP" altLang="en-US" sz="2400" dirty="0"/>
               <a:t>を</a:t>
             </a:r>
             <a:r>
-              <a:rPr kumimoji="1" lang="en-US" altLang="ja-JP" sz="2400" dirty="0" smtClean="0"/>
+              <a:rPr kumimoji="1" lang="en-US" altLang="ja-JP" sz="2400" dirty="0"/>
               <a:t>(</a:t>
             </a:r>
             <a:r>
-              <a:rPr lang="en-US" altLang="ja-JP" sz="2400" dirty="0" err="1" smtClean="0"/>
+              <a:rPr lang="en-US" altLang="ja-JP" sz="2400" dirty="0" err="1"/>
               <a:t>conseq</a:t>
             </a:r>
             <a:r>
-              <a:rPr kumimoji="1" lang="en-US" altLang="ja-JP" sz="2400" dirty="0" smtClean="0"/>
+              <a:rPr kumimoji="1" lang="en-US" altLang="ja-JP" sz="2400" dirty="0"/>
               <a:t>)</a:t>
             </a:r>
             <a:r>
-              <a:rPr kumimoji="1" lang="ja-JP" altLang="en-US" sz="2400" dirty="0" smtClean="0"/>
+              <a:rPr kumimoji="1" lang="ja-JP" altLang="en-US" sz="2400" dirty="0"/>
               <a:t>と略記しています。</a:t>
             </a:r>
-            <a:endParaRPr kumimoji="1" lang="ja-JP" altLang="en-US" sz="2400" dirty="0"/>
           </a:p>
         </p:txBody>
       </p:sp>
@@ -7629,11 +7509,11 @@
           <a:lstStyle/>
           <a:p>
             <a:r>
-              <a:rPr lang="en-US" altLang="ja-JP" dirty="0" smtClean="0"/>
+              <a:rPr lang="en-US" altLang="ja-JP" dirty="0"/>
               <a:t>(2) </a:t>
             </a:r>
             <a:r>
-              <a:rPr lang="ja-JP" altLang="en-US" dirty="0" smtClean="0"/>
+              <a:rPr lang="ja-JP" altLang="en-US" dirty="0"/>
               <a:t>解答</a:t>
             </a:r>
             <a:endParaRPr kumimoji="1" lang="ja-JP" altLang="en-US" dirty="0"/>
@@ -7698,7 +7578,7 @@
           <a:lstStyle/>
           <a:p>
             <a:r>
-              <a:rPr kumimoji="1" lang="en-US" altLang="ja-JP" sz="2400" dirty="0" smtClean="0"/>
+              <a:rPr kumimoji="1" lang="en-US" altLang="ja-JP" sz="2400" dirty="0"/>
               <a:t>(if)</a:t>
             </a:r>
             <a:endParaRPr kumimoji="1" lang="ja-JP" altLang="en-US" sz="2400" dirty="0"/>
@@ -7728,46 +7608,46 @@
           <a:p>
             <a:pPr marL="514350" indent="-514350"/>
             <a:r>
-              <a:rPr lang="en-US" altLang="ja-JP" sz="2400" dirty="0" smtClean="0"/>
+              <a:rPr lang="en-US" altLang="ja-JP" sz="2400" dirty="0"/>
               <a:t>{ a = 3 }  </a:t>
             </a:r>
             <a:r>
-              <a:rPr lang="en-US" altLang="ja-JP" sz="2400" b="1" dirty="0" smtClean="0"/>
+              <a:rPr lang="en-US" altLang="ja-JP" sz="2400" b="1" dirty="0"/>
               <a:t>if</a:t>
             </a:r>
             <a:r>
-              <a:rPr lang="en-US" altLang="ja-JP" sz="2400" dirty="0" smtClean="0"/>
+              <a:rPr lang="en-US" altLang="ja-JP" sz="2400" dirty="0"/>
               <a:t>  a = 3  </a:t>
             </a:r>
             <a:r>
-              <a:rPr lang="en-US" altLang="ja-JP" sz="2400" b="1" dirty="0" smtClean="0"/>
+              <a:rPr lang="en-US" altLang="ja-JP" sz="2400" b="1" dirty="0"/>
               <a:t>then</a:t>
             </a:r>
             <a:r>
-              <a:rPr lang="en-US" altLang="ja-JP" sz="2400" dirty="0" smtClean="0"/>
+              <a:rPr lang="en-US" altLang="ja-JP" sz="2400" dirty="0"/>
               <a:t>  a := a + 1</a:t>
             </a:r>
             <a:r>
-              <a:rPr lang="en-US" altLang="ja-JP" sz="2400" baseline="-25000" dirty="0" smtClean="0"/>
+              <a:rPr lang="en-US" altLang="ja-JP" sz="2400" baseline="-25000" dirty="0"/>
               <a:t>  </a:t>
             </a:r>
             <a:r>
-              <a:rPr lang="en-US" altLang="ja-JP" sz="2400" b="1" dirty="0" smtClean="0"/>
+              <a:rPr lang="en-US" altLang="ja-JP" sz="2400" b="1" dirty="0"/>
               <a:t>else</a:t>
             </a:r>
             <a:r>
-              <a:rPr lang="en-US" altLang="ja-JP" sz="2400" b="1" baseline="-25000" dirty="0" smtClean="0"/>
+              <a:rPr lang="en-US" altLang="ja-JP" sz="2400" b="1" baseline="-25000" dirty="0"/>
               <a:t> </a:t>
             </a:r>
             <a:r>
-              <a:rPr lang="en-US" altLang="ja-JP" sz="2400" baseline="-25000" dirty="0" smtClean="0"/>
+              <a:rPr lang="en-US" altLang="ja-JP" sz="2400" baseline="-25000" dirty="0"/>
               <a:t> </a:t>
             </a:r>
             <a:r>
-              <a:rPr lang="en-US" altLang="ja-JP" sz="2400" dirty="0" smtClean="0"/>
+              <a:rPr lang="en-US" altLang="ja-JP" sz="2400" dirty="0"/>
               <a:t>a := a – 1  { a = 4 }</a:t>
             </a:r>
-            <a:endParaRPr lang="ja-JP" altLang="en-US" sz="2400" dirty="0" smtClean="0"/>
+            <a:endParaRPr lang="ja-JP" altLang="en-US" sz="2400" dirty="0"/>
           </a:p>
         </p:txBody>
       </p:sp>
@@ -7794,28 +7674,28 @@
           <a:p>
             <a:pPr marL="514350" indent="-514350"/>
             <a:r>
-              <a:rPr lang="en-US" altLang="ja-JP" sz="2400" dirty="0" smtClean="0"/>
+              <a:rPr lang="en-US" altLang="ja-JP" sz="2400" dirty="0"/>
               <a:t>{ a = 3 </a:t>
             </a:r>
             <a:r>
-              <a:rPr lang="en-US" altLang="ja-JP" sz="2400" dirty="0" smtClean="0">
+              <a:rPr lang="en-US" altLang="ja-JP" sz="2400" dirty="0">
                 <a:sym typeface="Symbol"/>
               </a:rPr>
               <a:t> a = 3</a:t>
             </a:r>
             <a:r>
-              <a:rPr lang="en-US" altLang="ja-JP" sz="2400" dirty="0" smtClean="0"/>
+              <a:rPr lang="en-US" altLang="ja-JP" sz="2400" dirty="0"/>
               <a:t>}  a := a + 1</a:t>
             </a:r>
             <a:r>
-              <a:rPr lang="en-US" altLang="ja-JP" sz="2400" baseline="-25000" dirty="0" smtClean="0"/>
+              <a:rPr lang="en-US" altLang="ja-JP" sz="2400" baseline="-25000" dirty="0"/>
               <a:t> </a:t>
             </a:r>
             <a:r>
-              <a:rPr lang="en-US" altLang="ja-JP" sz="2400" dirty="0" smtClean="0"/>
+              <a:rPr lang="en-US" altLang="ja-JP" sz="2400" dirty="0"/>
               <a:t>{ a = 4 }</a:t>
             </a:r>
-            <a:endParaRPr lang="ja-JP" altLang="en-US" sz="2400" dirty="0" smtClean="0"/>
+            <a:endParaRPr lang="ja-JP" altLang="en-US" sz="2400" dirty="0"/>
           </a:p>
         </p:txBody>
       </p:sp>
@@ -7842,28 +7722,28 @@
           <a:p>
             <a:pPr marL="514350" indent="-514350"/>
             <a:r>
-              <a:rPr lang="en-US" altLang="ja-JP" sz="2400" dirty="0" smtClean="0"/>
+              <a:rPr lang="en-US" altLang="ja-JP" sz="2400" dirty="0"/>
               <a:t>{ a = 3 </a:t>
             </a:r>
             <a:r>
-              <a:rPr lang="en-US" altLang="ja-JP" sz="2400" dirty="0" smtClean="0">
+              <a:rPr lang="en-US" altLang="ja-JP" sz="2400" dirty="0">
                 <a:sym typeface="Symbol"/>
               </a:rPr>
               <a:t>  a = 3</a:t>
             </a:r>
             <a:r>
-              <a:rPr lang="en-US" altLang="ja-JP" sz="2400" dirty="0" smtClean="0"/>
+              <a:rPr lang="en-US" altLang="ja-JP" sz="2400" dirty="0"/>
               <a:t>}  a := a - 1</a:t>
             </a:r>
             <a:r>
-              <a:rPr lang="en-US" altLang="ja-JP" sz="2400" baseline="-25000" dirty="0" smtClean="0"/>
+              <a:rPr lang="en-US" altLang="ja-JP" sz="2400" baseline="-25000" dirty="0"/>
               <a:t> </a:t>
             </a:r>
             <a:r>
-              <a:rPr lang="en-US" altLang="ja-JP" sz="2400" dirty="0" smtClean="0"/>
+              <a:rPr lang="en-US" altLang="ja-JP" sz="2400" dirty="0"/>
               <a:t>{ a = 4 }</a:t>
             </a:r>
-            <a:endParaRPr lang="ja-JP" altLang="en-US" sz="2400" dirty="0" smtClean="0"/>
+            <a:endParaRPr lang="ja-JP" altLang="en-US" sz="2400" dirty="0"/>
           </a:p>
         </p:txBody>
       </p:sp>
@@ -7960,10 +7840,9 @@
           <a:lstStyle/>
           <a:p>
             <a:r>
-              <a:rPr kumimoji="1" lang="ja-JP" altLang="en-US" dirty="0" smtClean="0"/>
+              <a:rPr kumimoji="1" lang="ja-JP" altLang="en-US" dirty="0"/>
               <a:t>この部分は次ページに掲載</a:t>
             </a:r>
-            <a:endParaRPr kumimoji="1" lang="ja-JP" altLang="en-US" dirty="0"/>
           </a:p>
         </p:txBody>
       </p:sp>
@@ -7990,18 +7869,17 @@
           <a:lstStyle/>
           <a:p>
             <a:r>
-              <a:rPr kumimoji="1" lang="ja-JP" altLang="en-US" dirty="0" smtClean="0"/>
+              <a:rPr kumimoji="1" lang="ja-JP" altLang="en-US" dirty="0"/>
               <a:t>この部分は</a:t>
             </a:r>
             <a:r>
-              <a:rPr kumimoji="1" lang="ja-JP" altLang="en-US" dirty="0" err="1" smtClean="0"/>
+              <a:rPr kumimoji="1" lang="ja-JP" altLang="en-US" dirty="0" err="1"/>
               <a:t>次の次の</a:t>
             </a:r>
             <a:r>
-              <a:rPr kumimoji="1" lang="ja-JP" altLang="en-US" dirty="0" smtClean="0"/>
+              <a:rPr kumimoji="1" lang="ja-JP" altLang="en-US" dirty="0"/>
               <a:t>ページに掲載</a:t>
             </a:r>
-            <a:endParaRPr kumimoji="1" lang="ja-JP" altLang="en-US" dirty="0"/>
           </a:p>
         </p:txBody>
       </p:sp>
@@ -8028,26 +7906,25 @@
           <a:lstStyle/>
           <a:p>
             <a:r>
-              <a:rPr kumimoji="1" lang="ja-JP" altLang="en-US" sz="2400" dirty="0" smtClean="0"/>
+              <a:rPr kumimoji="1" lang="ja-JP" altLang="en-US" sz="2400" dirty="0"/>
               <a:t>スペースが足りないので、</a:t>
             </a:r>
             <a:r>
-              <a:rPr kumimoji="1" lang="en-US" altLang="ja-JP" sz="2400" dirty="0" smtClean="0"/>
+              <a:rPr kumimoji="1" lang="en-US" altLang="ja-JP" sz="2400" dirty="0"/>
               <a:t>(conditional rule)</a:t>
             </a:r>
             <a:r>
-              <a:rPr kumimoji="1" lang="ja-JP" altLang="en-US" sz="2400" dirty="0" smtClean="0"/>
+              <a:rPr kumimoji="1" lang="ja-JP" altLang="en-US" sz="2400" dirty="0"/>
               <a:t>を</a:t>
             </a:r>
             <a:r>
-              <a:rPr kumimoji="1" lang="en-US" altLang="ja-JP" sz="2400" dirty="0" smtClean="0"/>
+              <a:rPr kumimoji="1" lang="en-US" altLang="ja-JP" sz="2400" dirty="0"/>
               <a:t>(if)</a:t>
             </a:r>
             <a:r>
-              <a:rPr kumimoji="1" lang="ja-JP" altLang="en-US" sz="2400" dirty="0" smtClean="0"/>
+              <a:rPr kumimoji="1" lang="ja-JP" altLang="en-US" sz="2400" dirty="0"/>
               <a:t>と略記しています。</a:t>
             </a:r>
-            <a:endParaRPr kumimoji="1" lang="ja-JP" altLang="en-US" sz="2400" dirty="0"/>
           </a:p>
         </p:txBody>
       </p:sp>
@@ -8092,11 +7969,11 @@
           <a:lstStyle/>
           <a:p>
             <a:r>
-              <a:rPr lang="en-US" altLang="ja-JP" dirty="0" smtClean="0"/>
+              <a:rPr lang="en-US" altLang="ja-JP" dirty="0"/>
               <a:t>(2) </a:t>
             </a:r>
             <a:r>
-              <a:rPr lang="ja-JP" altLang="en-US" dirty="0" smtClean="0"/>
+              <a:rPr lang="ja-JP" altLang="en-US" dirty="0"/>
               <a:t>解答の続き（左側）</a:t>
             </a:r>
             <a:endParaRPr kumimoji="1" lang="ja-JP" altLang="en-US" dirty="0"/>
@@ -8161,7 +8038,7 @@
           <a:lstStyle/>
           <a:p>
             <a:r>
-              <a:rPr kumimoji="1" lang="en-US" altLang="ja-JP" sz="2000" dirty="0" smtClean="0"/>
+              <a:rPr kumimoji="1" lang="en-US" altLang="ja-JP" sz="2000" dirty="0"/>
               <a:t>(assignment)</a:t>
             </a:r>
             <a:endParaRPr kumimoji="1" lang="ja-JP" altLang="en-US" sz="2000" dirty="0"/>
@@ -8191,28 +8068,28 @@
           <a:p>
             <a:pPr marL="514350" indent="-514350"/>
             <a:r>
-              <a:rPr lang="en-US" altLang="ja-JP" sz="2400" dirty="0" smtClean="0"/>
+              <a:rPr lang="en-US" altLang="ja-JP" sz="2400" dirty="0"/>
               <a:t>{ a = 3 </a:t>
             </a:r>
             <a:r>
-              <a:rPr lang="en-US" altLang="ja-JP" sz="2400" dirty="0" smtClean="0">
+              <a:rPr lang="en-US" altLang="ja-JP" sz="2400" dirty="0">
                 <a:sym typeface="Symbol"/>
               </a:rPr>
               <a:t> a = 3</a:t>
             </a:r>
             <a:r>
-              <a:rPr lang="en-US" altLang="ja-JP" sz="2400" dirty="0" smtClean="0"/>
+              <a:rPr lang="en-US" altLang="ja-JP" sz="2400" dirty="0"/>
               <a:t>}  a := a + 1</a:t>
             </a:r>
             <a:r>
-              <a:rPr lang="en-US" altLang="ja-JP" sz="2400" baseline="-25000" dirty="0" smtClean="0"/>
+              <a:rPr lang="en-US" altLang="ja-JP" sz="2400" baseline="-25000" dirty="0"/>
               <a:t> </a:t>
             </a:r>
             <a:r>
-              <a:rPr lang="en-US" altLang="ja-JP" sz="2400" dirty="0" smtClean="0"/>
+              <a:rPr lang="en-US" altLang="ja-JP" sz="2400" dirty="0"/>
               <a:t>{ a = 4 }</a:t>
             </a:r>
-            <a:endParaRPr lang="ja-JP" altLang="en-US" sz="2400" dirty="0" smtClean="0"/>
+            <a:endParaRPr lang="ja-JP" altLang="en-US" sz="2400" dirty="0"/>
           </a:p>
         </p:txBody>
       </p:sp>
@@ -8274,44 +8151,44 @@
           <a:p>
             <a:pPr marL="514350" indent="-514350"/>
             <a:r>
-              <a:rPr lang="en-US" altLang="ja-JP" sz="2400" dirty="0" smtClean="0"/>
+              <a:rPr lang="en-US" altLang="ja-JP" sz="2400" dirty="0"/>
               <a:t>(a = 3 </a:t>
             </a:r>
             <a:r>
-              <a:rPr lang="en-US" altLang="ja-JP" sz="2400" dirty="0" smtClean="0">
+              <a:rPr lang="en-US" altLang="ja-JP" sz="2400" dirty="0">
                 <a:sym typeface="Symbol"/>
               </a:rPr>
               <a:t> a = 3)  a+1 = 4   </a:t>
             </a:r>
             <a:r>
-              <a:rPr lang="en-US" altLang="ja-JP" sz="2400" dirty="0" smtClean="0"/>
+              <a:rPr lang="en-US" altLang="ja-JP" sz="2400" dirty="0"/>
               <a:t>{a+1</a:t>
             </a:r>
             <a:r>
-              <a:rPr lang="en-US" altLang="ja-JP" sz="2400" dirty="0" smtClean="0">
+              <a:rPr lang="en-US" altLang="ja-JP" sz="2400" dirty="0">
                 <a:sym typeface="Symbol"/>
               </a:rPr>
               <a:t> = 4</a:t>
             </a:r>
             <a:r>
-              <a:rPr lang="en-US" altLang="ja-JP" sz="2400" dirty="0" smtClean="0"/>
+              <a:rPr lang="en-US" altLang="ja-JP" sz="2400" dirty="0"/>
               <a:t>}  a := a + 1</a:t>
             </a:r>
             <a:r>
-              <a:rPr lang="en-US" altLang="ja-JP" sz="2400" baseline="-25000" dirty="0" smtClean="0"/>
+              <a:rPr lang="en-US" altLang="ja-JP" sz="2400" baseline="-25000" dirty="0"/>
               <a:t> </a:t>
             </a:r>
             <a:r>
-              <a:rPr lang="en-US" altLang="ja-JP" sz="2400" dirty="0" smtClean="0"/>
+              <a:rPr lang="en-US" altLang="ja-JP" sz="2400" dirty="0"/>
               <a:t>{a = 4}   a=4 </a:t>
             </a:r>
             <a:r>
-              <a:rPr lang="en-US" altLang="ja-JP" sz="2400" dirty="0" smtClean="0">
+              <a:rPr lang="en-US" altLang="ja-JP" sz="2400" dirty="0">
                 <a:sym typeface="Symbol"/>
               </a:rPr>
               <a:t> a=4</a:t>
             </a:r>
-            <a:endParaRPr lang="ja-JP" altLang="en-US" sz="2400" dirty="0" smtClean="0"/>
+            <a:endParaRPr lang="ja-JP" altLang="en-US" sz="2400" dirty="0"/>
           </a:p>
         </p:txBody>
       </p:sp>
@@ -8338,7 +8215,7 @@
           <a:lstStyle/>
           <a:p>
             <a:r>
-              <a:rPr kumimoji="1" lang="en-US" altLang="ja-JP" sz="2000" dirty="0" smtClean="0"/>
+              <a:rPr kumimoji="1" lang="en-US" altLang="ja-JP" sz="2000" dirty="0"/>
               <a:t>(consequence)</a:t>
             </a:r>
             <a:endParaRPr kumimoji="1" lang="ja-JP" altLang="en-US" sz="2000" dirty="0"/>
@@ -8466,11 +8343,11 @@
           <a:lstStyle/>
           <a:p>
             <a:r>
-              <a:rPr lang="en-US" altLang="ja-JP" dirty="0" smtClean="0"/>
+              <a:rPr lang="en-US" altLang="ja-JP" dirty="0"/>
               <a:t>(2) </a:t>
             </a:r>
             <a:r>
-              <a:rPr lang="ja-JP" altLang="en-US" dirty="0" smtClean="0"/>
+              <a:rPr lang="ja-JP" altLang="en-US" dirty="0"/>
               <a:t>解答の続き（右側）</a:t>
             </a:r>
             <a:endParaRPr kumimoji="1" lang="ja-JP" altLang="en-US" dirty="0"/>
@@ -8535,7 +8412,7 @@
           <a:lstStyle/>
           <a:p>
             <a:r>
-              <a:rPr kumimoji="1" lang="en-US" altLang="ja-JP" sz="2000" dirty="0" smtClean="0"/>
+              <a:rPr kumimoji="1" lang="en-US" altLang="ja-JP" sz="2000" dirty="0"/>
               <a:t>(assignment)</a:t>
             </a:r>
             <a:endParaRPr kumimoji="1" lang="ja-JP" altLang="en-US" sz="2000" dirty="0"/>
@@ -8600,44 +8477,44 @@
           <a:p>
             <a:pPr marL="514350" indent="-514350"/>
             <a:r>
-              <a:rPr lang="en-US" altLang="ja-JP" sz="2400" dirty="0" smtClean="0"/>
+              <a:rPr lang="en-US" altLang="ja-JP" sz="2400" dirty="0"/>
               <a:t>(a = 3 </a:t>
             </a:r>
             <a:r>
-              <a:rPr lang="en-US" altLang="ja-JP" sz="2400" dirty="0" smtClean="0">
+              <a:rPr lang="en-US" altLang="ja-JP" sz="2400" dirty="0">
                 <a:sym typeface="Symbol"/>
               </a:rPr>
               <a:t>  a = 3)  a-1 = 4   </a:t>
             </a:r>
             <a:r>
-              <a:rPr lang="en-US" altLang="ja-JP" sz="2400" dirty="0" smtClean="0"/>
+              <a:rPr lang="en-US" altLang="ja-JP" sz="2400" dirty="0"/>
               <a:t>{a-1</a:t>
             </a:r>
             <a:r>
-              <a:rPr lang="en-US" altLang="ja-JP" sz="2400" dirty="0" smtClean="0">
+              <a:rPr lang="en-US" altLang="ja-JP" sz="2400" dirty="0">
                 <a:sym typeface="Symbol"/>
               </a:rPr>
               <a:t>=4</a:t>
             </a:r>
             <a:r>
-              <a:rPr lang="en-US" altLang="ja-JP" sz="2400" dirty="0" smtClean="0"/>
+              <a:rPr lang="en-US" altLang="ja-JP" sz="2400" dirty="0"/>
               <a:t>}  a := a - 1</a:t>
             </a:r>
             <a:r>
-              <a:rPr lang="en-US" altLang="ja-JP" sz="2400" baseline="-25000" dirty="0" smtClean="0"/>
+              <a:rPr lang="en-US" altLang="ja-JP" sz="2400" baseline="-25000" dirty="0"/>
               <a:t> </a:t>
             </a:r>
             <a:r>
-              <a:rPr lang="en-US" altLang="ja-JP" sz="2400" dirty="0" smtClean="0"/>
+              <a:rPr lang="en-US" altLang="ja-JP" sz="2400" dirty="0"/>
               <a:t>{a=4}   a=4 </a:t>
             </a:r>
             <a:r>
-              <a:rPr lang="en-US" altLang="ja-JP" sz="2400" dirty="0" smtClean="0">
+              <a:rPr lang="en-US" altLang="ja-JP" sz="2400" dirty="0">
                 <a:sym typeface="Symbol"/>
               </a:rPr>
               <a:t> a=4</a:t>
             </a:r>
-            <a:endParaRPr lang="ja-JP" altLang="en-US" sz="2400" dirty="0" smtClean="0"/>
+            <a:endParaRPr lang="ja-JP" altLang="en-US" sz="2400" dirty="0"/>
           </a:p>
         </p:txBody>
       </p:sp>
@@ -8664,7 +8541,7 @@
           <a:lstStyle/>
           <a:p>
             <a:r>
-              <a:rPr kumimoji="1" lang="en-US" altLang="ja-JP" sz="2000" dirty="0" smtClean="0"/>
+              <a:rPr kumimoji="1" lang="en-US" altLang="ja-JP" sz="2000" dirty="0"/>
               <a:t>(consequence)</a:t>
             </a:r>
             <a:endParaRPr kumimoji="1" lang="ja-JP" altLang="en-US" sz="2000" dirty="0"/>
@@ -8774,28 +8651,28 @@
           <a:p>
             <a:pPr marL="514350" indent="-514350"/>
             <a:r>
-              <a:rPr lang="en-US" altLang="ja-JP" sz="2400" dirty="0" smtClean="0"/>
+              <a:rPr lang="en-US" altLang="ja-JP" sz="2400" dirty="0"/>
               <a:t>{ a = 3 </a:t>
             </a:r>
             <a:r>
-              <a:rPr lang="en-US" altLang="ja-JP" sz="2400" dirty="0" smtClean="0">
+              <a:rPr lang="en-US" altLang="ja-JP" sz="2400" dirty="0">
                 <a:sym typeface="Symbol"/>
               </a:rPr>
               <a:t>  a = 3</a:t>
             </a:r>
             <a:r>
-              <a:rPr lang="en-US" altLang="ja-JP" sz="2400" dirty="0" smtClean="0"/>
+              <a:rPr lang="en-US" altLang="ja-JP" sz="2400" dirty="0"/>
               <a:t>}  a := a - 1</a:t>
             </a:r>
             <a:r>
-              <a:rPr lang="en-US" altLang="ja-JP" sz="2400" baseline="-25000" dirty="0" smtClean="0"/>
+              <a:rPr lang="en-US" altLang="ja-JP" sz="2400" baseline="-25000" dirty="0"/>
               <a:t> </a:t>
             </a:r>
             <a:r>
-              <a:rPr lang="en-US" altLang="ja-JP" sz="2400" dirty="0" smtClean="0"/>
+              <a:rPr lang="en-US" altLang="ja-JP" sz="2400" dirty="0"/>
               <a:t>{ a = 4 }</a:t>
             </a:r>
-            <a:endParaRPr lang="ja-JP" altLang="en-US" sz="2400" dirty="0" smtClean="0"/>
+            <a:endParaRPr lang="ja-JP" altLang="en-US" sz="2400" dirty="0"/>
           </a:p>
         </p:txBody>
       </p:sp>
@@ -8822,163 +8699,163 @@
           <a:lstStyle/>
           <a:p>
             <a:r>
-              <a:rPr lang="ja-JP" altLang="en-US" sz="2800" dirty="0" smtClean="0"/>
+              <a:rPr lang="ja-JP" altLang="en-US" sz="2800" dirty="0"/>
               <a:t>（</a:t>
             </a:r>
             <a:r>
-              <a:rPr kumimoji="1" lang="ja-JP" altLang="en-US" sz="2800" dirty="0" smtClean="0"/>
+              <a:rPr kumimoji="1" lang="ja-JP" altLang="en-US" sz="2800" dirty="0"/>
               <a:t>注） 論理式</a:t>
             </a:r>
             <a:r>
-              <a:rPr lang="en-US" altLang="ja-JP" sz="2800" dirty="0" smtClean="0"/>
+              <a:rPr lang="en-US" altLang="ja-JP" sz="2800" dirty="0"/>
               <a:t>(a = 3 </a:t>
             </a:r>
             <a:r>
-              <a:rPr lang="en-US" altLang="ja-JP" sz="2800" dirty="0" smtClean="0">
+              <a:rPr lang="en-US" altLang="ja-JP" sz="2800" dirty="0">
                 <a:sym typeface="Symbol"/>
               </a:rPr>
               <a:t>  a = 3)  a-1 = 4 </a:t>
             </a:r>
             <a:r>
-              <a:rPr lang="ja-JP" altLang="en-US" sz="2800" dirty="0" smtClean="0">
+              <a:rPr lang="ja-JP" altLang="en-US" sz="2800" dirty="0">
                 <a:sym typeface="Symbol"/>
               </a:rPr>
               <a:t>が</a:t>
             </a:r>
             <a:r>
-              <a:rPr lang="en-US" altLang="ja-JP" sz="2800" dirty="0" smtClean="0">
+              <a:rPr lang="en-US" altLang="ja-JP" sz="2800" dirty="0">
                 <a:sym typeface="Symbol"/>
               </a:rPr>
               <a:t>true</a:t>
             </a:r>
             <a:r>
-              <a:rPr lang="ja-JP" altLang="en-US" sz="2800" dirty="0" smtClean="0">
+              <a:rPr lang="ja-JP" altLang="en-US" sz="2800" dirty="0">
                 <a:sym typeface="Symbol"/>
               </a:rPr>
               <a:t>になることの説明： </a:t>
             </a:r>
-            <a:endParaRPr lang="en-US" altLang="ja-JP" sz="2800" dirty="0" smtClean="0">
+            <a:endParaRPr lang="en-US" altLang="ja-JP" sz="2800" dirty="0">
               <a:sym typeface="Symbol"/>
             </a:endParaRPr>
           </a:p>
           <a:p>
             <a:r>
-              <a:rPr kumimoji="1" lang="ja-JP" altLang="en-US" sz="2800" dirty="0" smtClean="0"/>
+              <a:rPr kumimoji="1" lang="ja-JP" altLang="en-US" sz="2800" dirty="0"/>
               <a:t>論理式 </a:t>
             </a:r>
             <a:r>
-              <a:rPr lang="en-US" altLang="ja-JP" sz="2800" dirty="0" smtClean="0"/>
+              <a:rPr lang="en-US" altLang="ja-JP" sz="2800" dirty="0"/>
               <a:t>a = 3 </a:t>
             </a:r>
             <a:r>
-              <a:rPr lang="en-US" altLang="ja-JP" sz="2800" dirty="0" smtClean="0">
+              <a:rPr lang="en-US" altLang="ja-JP" sz="2800" dirty="0">
                 <a:sym typeface="Symbol"/>
               </a:rPr>
               <a:t>  a = 3 </a:t>
             </a:r>
             <a:r>
-              <a:rPr lang="ja-JP" altLang="en-US" sz="2800" dirty="0" smtClean="0">
+              <a:rPr lang="ja-JP" altLang="en-US" sz="2800" dirty="0">
                 <a:sym typeface="Symbol"/>
               </a:rPr>
               <a:t>は</a:t>
             </a:r>
             <a:r>
-              <a:rPr lang="en-US" altLang="ja-JP" sz="2800" dirty="0" smtClean="0">
+              <a:rPr lang="en-US" altLang="ja-JP" sz="2800" dirty="0">
                 <a:sym typeface="Symbol"/>
               </a:rPr>
               <a:t>a</a:t>
             </a:r>
             <a:r>
-              <a:rPr lang="ja-JP" altLang="en-US" sz="2800" dirty="0" smtClean="0">
+              <a:rPr lang="ja-JP" altLang="en-US" sz="2800" dirty="0">
                 <a:sym typeface="Symbol"/>
               </a:rPr>
               <a:t>の値が何であっても</a:t>
             </a:r>
             <a:r>
-              <a:rPr lang="en-US" altLang="ja-JP" sz="2800" dirty="0" smtClean="0">
+              <a:rPr lang="en-US" altLang="ja-JP" sz="2800" dirty="0">
                 <a:sym typeface="Symbol"/>
               </a:rPr>
               <a:t>false</a:t>
             </a:r>
             <a:r>
-              <a:rPr lang="ja-JP" altLang="en-US" sz="2800" dirty="0" smtClean="0">
+              <a:rPr lang="ja-JP" altLang="en-US" sz="2800" dirty="0">
                 <a:sym typeface="Symbol"/>
               </a:rPr>
               <a:t>である。</a:t>
             </a:r>
             <a:r>
-              <a:rPr lang="en-US" altLang="ja-JP" sz="2800" dirty="0" smtClean="0">
+              <a:rPr lang="en-US" altLang="ja-JP" sz="2800" dirty="0">
                 <a:sym typeface="Symbol"/>
               </a:rPr>
               <a:t></a:t>
             </a:r>
             <a:r>
-              <a:rPr lang="ja-JP" altLang="en-US" sz="2800" dirty="0" smtClean="0">
+              <a:rPr lang="ja-JP" altLang="en-US" sz="2800" dirty="0">
                 <a:sym typeface="Symbol"/>
               </a:rPr>
               <a:t>の定義より、</a:t>
             </a:r>
             <a:r>
-              <a:rPr lang="en-US" altLang="ja-JP" sz="2800" dirty="0" smtClean="0">
+              <a:rPr lang="en-US" altLang="ja-JP" sz="2800" dirty="0">
                 <a:sym typeface="Symbol"/>
               </a:rPr>
               <a:t> </a:t>
             </a:r>
             <a:r>
-              <a:rPr lang="ja-JP" altLang="en-US" sz="2800" dirty="0" smtClean="0">
+              <a:rPr lang="ja-JP" altLang="en-US" sz="2800" dirty="0">
                 <a:sym typeface="Symbol"/>
               </a:rPr>
               <a:t>の左が</a:t>
             </a:r>
             <a:r>
-              <a:rPr lang="en-US" altLang="ja-JP" sz="2800" dirty="0" smtClean="0">
+              <a:rPr lang="en-US" altLang="ja-JP" sz="2800" dirty="0">
                 <a:sym typeface="Symbol"/>
               </a:rPr>
               <a:t>false</a:t>
             </a:r>
             <a:r>
-              <a:rPr lang="ja-JP" altLang="en-US" sz="2800" dirty="0" smtClean="0">
+              <a:rPr lang="ja-JP" altLang="en-US" sz="2800" dirty="0">
                 <a:sym typeface="Symbol"/>
               </a:rPr>
               <a:t>なら、右は</a:t>
             </a:r>
             <a:r>
-              <a:rPr lang="en-US" altLang="ja-JP" sz="2800" dirty="0" smtClean="0">
+              <a:rPr lang="en-US" altLang="ja-JP" sz="2800" dirty="0">
                 <a:sym typeface="Symbol"/>
               </a:rPr>
               <a:t>true</a:t>
             </a:r>
             <a:r>
-              <a:rPr lang="ja-JP" altLang="en-US" sz="2800" dirty="0" smtClean="0">
+              <a:rPr lang="ja-JP" altLang="en-US" sz="2800" dirty="0">
                 <a:sym typeface="Symbol"/>
               </a:rPr>
               <a:t>でも</a:t>
             </a:r>
             <a:r>
-              <a:rPr lang="en-US" altLang="ja-JP" sz="2800" dirty="0" smtClean="0">
+              <a:rPr lang="en-US" altLang="ja-JP" sz="2800" dirty="0">
                 <a:sym typeface="Symbol"/>
               </a:rPr>
               <a:t>false</a:t>
             </a:r>
             <a:r>
-              <a:rPr lang="ja-JP" altLang="en-US" sz="2800" dirty="0" smtClean="0">
+              <a:rPr lang="ja-JP" altLang="en-US" sz="2800" dirty="0">
                 <a:sym typeface="Symbol"/>
               </a:rPr>
               <a:t>でも全体は</a:t>
             </a:r>
             <a:r>
-              <a:rPr lang="en-US" altLang="ja-JP" sz="2800" dirty="0" smtClean="0">
+              <a:rPr lang="en-US" altLang="ja-JP" sz="2800" dirty="0">
                 <a:sym typeface="Symbol"/>
               </a:rPr>
               <a:t>true</a:t>
             </a:r>
             <a:r>
-              <a:rPr lang="ja-JP" altLang="en-US" sz="2800" dirty="0" smtClean="0">
+              <a:rPr lang="ja-JP" altLang="en-US" sz="2800" dirty="0">
                 <a:sym typeface="Symbol"/>
               </a:rPr>
               <a:t>になる。</a:t>
             </a:r>
-            <a:endParaRPr lang="en-US" altLang="ja-JP" sz="2800" dirty="0" smtClean="0">
+            <a:endParaRPr lang="en-US" altLang="ja-JP" sz="2800" dirty="0">
               <a:sym typeface="Symbol"/>
             </a:endParaRPr>
           </a:p>
